--- a/202610_タナカホーム株式会社御中_青森店受注最大化に向けたマーケティング戦略_v2.pptx
+++ b/202610_タナカホーム株式会社御中_青森店受注最大化に向けたマーケティング戦略_v2.pptx
@@ -12,7 +12,6 @@
     <p:sldId id="305" r:id="rId3"/>
     <p:sldId id="306" r:id="rId4"/>
     <p:sldId id="307" r:id="rId5"/>
-    <p:sldId id="308" r:id="rId6"/>
     <p:sldId id="309" r:id="rId7"/>
     <p:sldId id="301" r:id="rId8"/>
   </p:sldIdLst>
@@ -6812,1337 +6811,6 @@
 </p:sld>
 </file>
 
-<file path=ppt/slides/slide5.xml><?xml version="1.0" encoding="utf-8"?>
-<p:sld xmlns:a="http://schemas.openxmlformats.org/drawingml/2006/main" xmlns:r="http://schemas.openxmlformats.org/officeDocument/2006/relationships" xmlns:p="http://schemas.openxmlformats.org/presentationml/2006/main">
-  <p:cSld>
-    <p:spTree>
-      <p:nvGrpSpPr>
-        <p:cNvPr id="1" name=""/>
-        <p:cNvGrpSpPr/>
-        <p:nvPr/>
-      </p:nvGrpSpPr>
-      <p:grpSpPr>
-        <a:xfrm>
-          <a:off x="0" y="0"/>
-          <a:ext cx="0" cy="0"/>
-          <a:chOff x="0" y="0"/>
-          <a:chExt cx="0" cy="0"/>
-        </a:xfrm>
-      </p:grpSpPr>
-      <p:sp>
-        <p:nvSpPr>
-          <p:cNvPr id="2" name="Google Shape;752;p28"/>
-          <p:cNvSpPr/>
-          <p:nvPr/>
-        </p:nvSpPr>
-        <p:spPr>
-          <a:xfrm>
-            <a:off x="549000" y="138240"/>
-            <a:ext cx="7680960" cy="338040"/>
-          </a:xfrm>
-          <a:prstGeom prst="rect">
-            <a:avLst/>
-          </a:prstGeom>
-          <a:noFill/>
-          <a:ln w="0">
-            <a:noFill/>
-          </a:ln>
-        </p:spPr>
-        <p:style>
-          <a:lnRef idx="0">
-            <a:scrgbClr r="0" g="0" b="0"/>
-          </a:lnRef>
-          <a:fillRef idx="0">
-            <a:scrgbClr r="0" g="0" b="0"/>
-          </a:fillRef>
-          <a:effectRef idx="0">
-            <a:scrgbClr r="0" g="0" b="0"/>
-          </a:effectRef>
-          <a:fontRef idx="minor"/>
-        </p:style>
-        <p:txBody>
-          <a:bodyPr anchor="ctr">
-            <a:spAutoFit/>
-          </a:bodyPr>
-          <a:lstStyle/>
-          <a:p>
-            <a:pPr defTabSz="914400">
-              <a:lnSpc>
-                <a:spcPct val="100000"/>
-              </a:lnSpc>
-            </a:pPr>
-            <a:r>
-              <a:rPr lang="ja-JP" sz="1600" b="1" u="none" strike="noStrike">
-                <a:solidFill>
-                  <a:srgbClr val="323366"/>
-                </a:solidFill>
-                <a:effectLst/>
-                <a:uFillTx/>
-                <a:latin typeface="メイリオ"/>
-                <a:ea typeface="メイリオ"/>
-              </a:rPr>
-              <a:t>現場体制：営業の追客の負担を減らし、事務との連携で数字を追う</a:t>
-            </a:r>
-            <a:endParaRPr lang="en-US" sz="1600" b="0" u="none" strike="noStrike">
-              <a:solidFill>
-                <a:srgbClr val="000000"/>
-              </a:solidFill>
-              <a:effectLst/>
-              <a:uFillTx/>
-              <a:latin typeface="メイリオ"/>
-            </a:endParaRPr>
-          </a:p>
-        </p:txBody>
-      </p:sp>
-      <p:sp>
-        <p:nvSpPr>
-          <p:cNvPr id="3" name="正方形/長方形 2"/>
-          <p:cNvSpPr/>
-          <p:nvPr/>
-        </p:nvSpPr>
-        <p:spPr>
-          <a:xfrm>
-            <a:off x="0" y="577800"/>
-            <a:ext cx="9905760" cy="812520"/>
-          </a:xfrm>
-          <a:prstGeom prst="rect">
-            <a:avLst/>
-          </a:prstGeom>
-          <a:noFill/>
-          <a:ln>
-            <a:noFill/>
-          </a:ln>
-          <a:effectLst>
-            <a:outerShdw blurRad="39960" dist="23040" dir="5400000" rotWithShape="0">
-              <a:srgbClr val="000000">
-                <a:alpha val="35000"/>
-              </a:srgbClr>
-            </a:outerShdw>
-          </a:effectLst>
-        </p:spPr>
-        <p:style>
-          <a:lnRef idx="1">
-            <a:schemeClr val="accent1"/>
-          </a:lnRef>
-          <a:fillRef idx="3">
-            <a:schemeClr val="accent1"/>
-          </a:fillRef>
-          <a:effectRef idx="2">
-            <a:schemeClr val="accent1"/>
-          </a:effectRef>
-          <a:fontRef idx="minor"/>
-        </p:style>
-        <p:txBody>
-          <a:bodyPr lIns="90000" tIns="45000" rIns="90000" bIns="45000" anchor="ctr">
-            <a:noAutofit/>
-          </a:bodyPr>
-          <a:lstStyle/>
-          <a:p>
-            <a:pPr algn="ctr" defTabSz="914400">
-              <a:lnSpc>
-                <a:spcPct val="100000"/>
-              </a:lnSpc>
-            </a:pPr>
-            <a:endParaRPr lang="en-US" sz="1800" b="0" u="none" strike="noStrike">
-              <a:solidFill>
-                <a:schemeClr val="lt1"/>
-              </a:solidFill>
-              <a:effectLst/>
-              <a:uFillTx/>
-              <a:latin typeface="メイリオ"/>
-              <a:ea typeface="メイリオ"/>
-            </a:endParaRPr>
-          </a:p>
-        </p:txBody>
-      </p:sp>
-      <p:sp>
-        <p:nvSpPr>
-          <p:cNvPr id="4" name="正方形/長方形 3"/>
-          <p:cNvSpPr/>
-          <p:nvPr/>
-        </p:nvSpPr>
-        <p:spPr>
-          <a:xfrm>
-            <a:off x="379800" y="635040"/>
-            <a:ext cx="9160560" cy="698040"/>
-          </a:xfrm>
-          <a:prstGeom prst="rect">
-            <a:avLst/>
-          </a:prstGeom>
-          <a:noFill/>
-          <a:ln>
-            <a:noFill/>
-          </a:ln>
-        </p:spPr>
-        <p:style>
-          <a:lnRef idx="2">
-            <a:schemeClr val="accent1">
-              <a:shade val="50000"/>
-            </a:schemeClr>
-          </a:lnRef>
-          <a:fillRef idx="1">
-            <a:schemeClr val="accent1"/>
-          </a:fillRef>
-          <a:effectRef idx="0">
-            <a:schemeClr val="accent1"/>
-          </a:effectRef>
-          <a:fontRef idx="minor"/>
-        </p:style>
-        <p:txBody>
-          <a:bodyPr lIns="90000" tIns="90000" rIns="90000" bIns="45000" anchor="ctr">
-            <a:noAutofit/>
-          </a:bodyPr>
-          <a:lstStyle/>
-          <a:p>
-            <a:pPr algn="ctr" defTabSz="914400">
-              <a:lnSpc>
-                <a:spcPts val="2455"/>
-              </a:lnSpc>
-            </a:pPr>
-            <a:endParaRPr lang="en-US" sz="1400" b="0" u="none" strike="noStrike">
-              <a:solidFill>
-                <a:srgbClr val="343434"/>
-              </a:solidFill>
-              <a:effectLst/>
-              <a:uFillTx/>
-              <a:latin typeface="メイリオ"/>
-              <a:ea typeface="メイリオ"/>
-            </a:endParaRPr>
-          </a:p>
-        </p:txBody>
-      </p:sp>
-      <p:cxnSp>
-        <p:nvCxnSpPr>
-          <p:cNvPr id="5" name="直線コネクタ 1"/>
-          <p:cNvCxnSpPr/>
-          <p:nvPr/>
-        </p:nvCxnSpPr>
-        <p:spPr>
-          <a:xfrm>
-            <a:off x="0" y="1390320"/>
-            <a:ext cx="9906120" cy="360"/>
-          </a:xfrm>
-          <a:prstGeom prst="straightConnector1">
-            <a:avLst/>
-          </a:prstGeom>
-          <a:ln w="19050">
-            <a:solidFill>
-              <a:schemeClr val="lt1">
-                <a:lumMod val="85000"/>
-                <a:alpha val="60000"/>
-              </a:schemeClr>
-            </a:solidFill>
-            <a:round/>
-          </a:ln>
-        </p:spPr>
-      </p:cxnSp>
-      <p:sp>
-        <p:nvSpPr>
-          <p:cNvPr id="6" name="テキスト ボックス 30"/>
-          <p:cNvSpPr/>
-          <p:nvPr/>
-        </p:nvSpPr>
-        <p:spPr>
-          <a:xfrm>
-            <a:off x="426240" y="635400"/>
-            <a:ext cx="9068760" cy="698400"/>
-          </a:xfrm>
-          <a:prstGeom prst="rect">
-            <a:avLst/>
-          </a:prstGeom>
-          <a:noFill/>
-          <a:ln w="0">
-            <a:noFill/>
-          </a:ln>
-        </p:spPr>
-        <p:style>
-          <a:lnRef idx="0">
-            <a:scrgbClr r="0" g="0" b="0"/>
-          </a:lnRef>
-          <a:fillRef idx="0">
-            <a:scrgbClr r="0" g="0" b="0"/>
-          </a:fillRef>
-          <a:effectRef idx="0">
-            <a:scrgbClr r="0" g="0" b="0"/>
-          </a:effectRef>
-          <a:fontRef idx="minor"/>
-        </p:style>
-        <p:txBody>
-          <a:bodyPr lIns="90000" tIns="45000" rIns="90000" bIns="45000" anchor="ctr">
-            <a:noAutofit/>
-          </a:bodyPr>
-          <a:lstStyle/>
-          <a:p>
-            <a:pPr algn="ctr" defTabSz="914400">
-              <a:lnSpc>
-                <a:spcPct val="100000"/>
-              </a:lnSpc>
-            </a:pPr>
-            <a:r>
-              <a:rPr lang="ja-JP" sz="1400" b="1" u="none" strike="noStrike" dirty="0">
-                <a:effectLst/>
-                <a:uFillTx/>
-                <a:latin typeface="メイリオ" panose="020B0604030504040204" pitchFamily="50" charset="-128"/>
-                <a:ea typeface="メイリオ" panose="020B0604030504040204" pitchFamily="50" charset="-128"/>
-              </a:rPr>
-              <a:t>個別チャットは営業、配信とリマインドは事務、設計と分析は弊社が担う</a:t>
-            </a:r>
-            <a:endParaRPr lang="en-US" sz="1400" b="1" u="none" strike="noStrike" dirty="0">
-              <a:effectLst/>
-              <a:uFillTx/>
-              <a:latin typeface="メイリオ"/>
-            </a:endParaRPr>
-          </a:p>
-        </p:txBody>
-      </p:sp>
-      <p:graphicFrame>
-        <p:nvGraphicFramePr>
-          <p:cNvPr id="7" name="体制 6"/>
-          <p:cNvGraphicFramePr>
-            <a:graphicFrameLocks noGrp="1"/>
-          </p:cNvGraphicFramePr>
-          <p:nvPr/>
-        </p:nvGraphicFramePr>
-        <p:xfrm>
-          <a:off x="502920" y="1691640"/>
-          <a:ext cx="8897112" cy="3200400"/>
-        </p:xfrm>
-        <a:graphic>
-          <a:graphicData uri="http://schemas.openxmlformats.org/drawingml/2006/table">
-            <a:tbl>
-              <a:tblPr/>
-              <a:tblGrid>
-                <a:gridCol w="1371600">
-                  <a:extLst>
-                    <a:ext uri="{9D8B030D-6E8A-4147-A177-3AD203B41FA5}">
-                      <a16:colId xmlns:a16="http://schemas.microsoft.com/office/drawing/2014/main" val="20000"/>
-                    </a:ext>
-                  </a:extLst>
-                </a:gridCol>
-                <a:gridCol w="2194560">
-                  <a:extLst>
-                    <a:ext uri="{9D8B030D-6E8A-4147-A177-3AD203B41FA5}">
-                      <a16:colId xmlns:a16="http://schemas.microsoft.com/office/drawing/2014/main" val="20001"/>
-                    </a:ext>
-                  </a:extLst>
-                </a:gridCol>
-                <a:gridCol w="5330952">
-                  <a:extLst>
-                    <a:ext uri="{9D8B030D-6E8A-4147-A177-3AD203B41FA5}">
-                      <a16:colId xmlns:a16="http://schemas.microsoft.com/office/drawing/2014/main" val="20002"/>
-                    </a:ext>
-                  </a:extLst>
-                </a:gridCol>
-              </a:tblGrid>
-              <a:tr h="365760">
-                <a:tc>
-                  <a:txBody>
-                    <a:bodyPr/>
-                    <a:lstStyle/>
-                    <a:p>
-                      <a:pPr algn="ctr">
-                        <a:buNone/>
-                      </a:pPr>
-                      <a:r>
-                        <a:rPr lang="ja-JP" altLang="en-US" sz="1150" b="1" dirty="0">
-                          <a:solidFill>
-                            <a:srgbClr val="FFFFFF"/>
-                          </a:solidFill>
-                          <a:latin typeface="メイリオ" panose="020B0604030504040204" pitchFamily="50" charset="-128"/>
-                          <a:ea typeface="メイリオ" panose="020B0604030504040204" pitchFamily="50" charset="-128"/>
-                        </a:rPr>
-                        <a:t>担当</a:t>
-                      </a:r>
-                      <a:endParaRPr lang="ja-JP" altLang="en-US" sz="1150" dirty="0"/>
-                    </a:p>
-                  </a:txBody>
-                  <a:tcPr marL="73152" marR="73152" marT="27432" marB="27432" anchor="ctr">
-                    <a:lnL w="9525" cap="flat" cmpd="sng" algn="ctr">
-                      <a:solidFill>
-                        <a:srgbClr val="D9D9D9"/>
-                      </a:solidFill>
-                      <a:prstDash val="solid"/>
-                      <a:round/>
-                      <a:headEnd type="none" w="med" len="med"/>
-                      <a:tailEnd type="none" w="med" len="med"/>
-                    </a:lnL>
-                    <a:lnR w="9525" cap="flat" cmpd="sng" algn="ctr">
-                      <a:solidFill>
-                        <a:srgbClr val="D9D9D9"/>
-                      </a:solidFill>
-                      <a:prstDash val="solid"/>
-                      <a:round/>
-                      <a:headEnd type="none" w="med" len="med"/>
-                      <a:tailEnd type="none" w="med" len="med"/>
-                    </a:lnR>
-                    <a:lnT w="9525" cap="flat" cmpd="sng" algn="ctr">
-                      <a:solidFill>
-                        <a:srgbClr val="D9D9D9"/>
-                      </a:solidFill>
-                      <a:prstDash val="solid"/>
-                      <a:round/>
-                      <a:headEnd type="none" w="med" len="med"/>
-                      <a:tailEnd type="none" w="med" len="med"/>
-                    </a:lnT>
-                    <a:lnB w="9525" cap="flat" cmpd="sng" algn="ctr">
-                      <a:solidFill>
-                        <a:srgbClr val="D9D9D9"/>
-                      </a:solidFill>
-                      <a:prstDash val="solid"/>
-                      <a:round/>
-                      <a:headEnd type="none" w="med" len="med"/>
-                      <a:tailEnd type="none" w="med" len="med"/>
-                    </a:lnB>
-                    <a:solidFill>
-                      <a:srgbClr val="1F285A"/>
-                    </a:solidFill>
-                  </a:tcPr>
-                </a:tc>
-                <a:tc>
-                  <a:txBody>
-                    <a:bodyPr/>
-                    <a:lstStyle/>
-                    <a:p>
-                      <a:pPr algn="ctr">
-                        <a:buNone/>
-                      </a:pPr>
-                      <a:r>
-                        <a:rPr lang="ja-JP" altLang="en-US" sz="1150" b="1" dirty="0">
-                          <a:solidFill>
-                            <a:srgbClr val="FFFFFF"/>
-                          </a:solidFill>
-                          <a:latin typeface="メイリオ" panose="020B0604030504040204" pitchFamily="50" charset="-128"/>
-                          <a:ea typeface="メイリオ" panose="020B0604030504040204" pitchFamily="50" charset="-128"/>
-                        </a:rPr>
-                        <a:t>役割</a:t>
-                      </a:r>
-                      <a:endParaRPr lang="ja-JP" altLang="en-US" sz="1150" dirty="0"/>
-                    </a:p>
-                  </a:txBody>
-                  <a:tcPr marL="73152" marR="73152" marT="27432" marB="27432" anchor="ctr">
-                    <a:lnL w="9525" cap="flat" cmpd="sng" algn="ctr">
-                      <a:solidFill>
-                        <a:srgbClr val="D9D9D9"/>
-                      </a:solidFill>
-                      <a:prstDash val="solid"/>
-                      <a:round/>
-                      <a:headEnd type="none" w="med" len="med"/>
-                      <a:tailEnd type="none" w="med" len="med"/>
-                    </a:lnL>
-                    <a:lnR w="9525" cap="flat" cmpd="sng" algn="ctr">
-                      <a:solidFill>
-                        <a:srgbClr val="D9D9D9"/>
-                      </a:solidFill>
-                      <a:prstDash val="solid"/>
-                      <a:round/>
-                      <a:headEnd type="none" w="med" len="med"/>
-                      <a:tailEnd type="none" w="med" len="med"/>
-                    </a:lnR>
-                    <a:lnT w="9525" cap="flat" cmpd="sng" algn="ctr">
-                      <a:solidFill>
-                        <a:srgbClr val="D9D9D9"/>
-                      </a:solidFill>
-                      <a:prstDash val="solid"/>
-                      <a:round/>
-                      <a:headEnd type="none" w="med" len="med"/>
-                      <a:tailEnd type="none" w="med" len="med"/>
-                    </a:lnT>
-                    <a:lnB w="9525" cap="flat" cmpd="sng" algn="ctr">
-                      <a:solidFill>
-                        <a:srgbClr val="D9D9D9"/>
-                      </a:solidFill>
-                      <a:prstDash val="solid"/>
-                      <a:round/>
-                      <a:headEnd type="none" w="med" len="med"/>
-                      <a:tailEnd type="none" w="med" len="med"/>
-                    </a:lnB>
-                    <a:solidFill>
-                      <a:srgbClr val="1F285A"/>
-                    </a:solidFill>
-                  </a:tcPr>
-                </a:tc>
-                <a:tc>
-                  <a:txBody>
-                    <a:bodyPr/>
-                    <a:lstStyle/>
-                    <a:p>
-                      <a:pPr algn="ctr">
-                        <a:buNone/>
-                      </a:pPr>
-                      <a:r>
-                        <a:rPr lang="ja-JP" altLang="en-US" sz="1150" b="1" dirty="0">
-                          <a:solidFill>
-                            <a:srgbClr val="FFFFFF"/>
-                          </a:solidFill>
-                          <a:latin typeface="メイリオ" panose="020B0604030504040204" pitchFamily="50" charset="-128"/>
-                          <a:ea typeface="メイリオ" panose="020B0604030504040204" pitchFamily="50" charset="-128"/>
-                        </a:rPr>
-                        <a:t>LINEでやること</a:t>
-                      </a:r>
-                      <a:endParaRPr lang="ja-JP" altLang="en-US" sz="1150" dirty="0"/>
-                    </a:p>
-                  </a:txBody>
-                  <a:tcPr marL="73152" marR="73152" marT="27432" marB="27432" anchor="ctr">
-                    <a:lnL w="9525" cap="flat" cmpd="sng" algn="ctr">
-                      <a:solidFill>
-                        <a:srgbClr val="D9D9D9"/>
-                      </a:solidFill>
-                      <a:prstDash val="solid"/>
-                      <a:round/>
-                      <a:headEnd type="none" w="med" len="med"/>
-                      <a:tailEnd type="none" w="med" len="med"/>
-                    </a:lnL>
-                    <a:lnR w="9525" cap="flat" cmpd="sng" algn="ctr">
-                      <a:solidFill>
-                        <a:srgbClr val="D9D9D9"/>
-                      </a:solidFill>
-                      <a:prstDash val="solid"/>
-                      <a:round/>
-                      <a:headEnd type="none" w="med" len="med"/>
-                      <a:tailEnd type="none" w="med" len="med"/>
-                    </a:lnR>
-                    <a:lnT w="9525" cap="flat" cmpd="sng" algn="ctr">
-                      <a:solidFill>
-                        <a:srgbClr val="D9D9D9"/>
-                      </a:solidFill>
-                      <a:prstDash val="solid"/>
-                      <a:round/>
-                      <a:headEnd type="none" w="med" len="med"/>
-                      <a:tailEnd type="none" w="med" len="med"/>
-                    </a:lnT>
-                    <a:lnB w="9525" cap="flat" cmpd="sng" algn="ctr">
-                      <a:solidFill>
-                        <a:srgbClr val="D9D9D9"/>
-                      </a:solidFill>
-                      <a:prstDash val="solid"/>
-                      <a:round/>
-                      <a:headEnd type="none" w="med" len="med"/>
-                      <a:tailEnd type="none" w="med" len="med"/>
-                    </a:lnB>
-                    <a:solidFill>
-                      <a:srgbClr val="1F285A"/>
-                    </a:solidFill>
-                  </a:tcPr>
-                </a:tc>
-                <a:extLst>
-                  <a:ext uri="{0D108BD9-81ED-4DB2-BD59-A6C34878D82A}">
-                    <a16:rowId xmlns:a16="http://schemas.microsoft.com/office/drawing/2014/main" val="10000"/>
-                  </a:ext>
-                </a:extLst>
-              </a:tr>
-              <a:tr h="868680">
-                <a:tc>
-                  <a:txBody>
-                    <a:bodyPr/>
-                    <a:lstStyle/>
-                    <a:p>
-                      <a:pPr algn="ctr">
-                        <a:buNone/>
-                      </a:pPr>
-                      <a:r>
-                        <a:rPr lang="ja-JP" altLang="en-US" sz="1150" b="1" dirty="0">
-                          <a:solidFill>
-                            <a:srgbClr val="1F285A"/>
-                          </a:solidFill>
-                          <a:latin typeface="メイリオ" panose="020B0604030504040204" pitchFamily="50" charset="-128"/>
-                          <a:ea typeface="メイリオ" panose="020B0604030504040204" pitchFamily="50" charset="-128"/>
-                        </a:rPr>
-                        <a:t>営業</a:t>
-                      </a:r>
-                      <a:endParaRPr lang="ja-JP" altLang="en-US" sz="1150" dirty="0"/>
-                    </a:p>
-                  </a:txBody>
-                  <a:tcPr marR="73152" marT="36576" marB="36576" anchor="ctr">
-                    <a:lnL w="9525" cap="flat" cmpd="sng" algn="ctr">
-                      <a:solidFill>
-                        <a:srgbClr val="D9D9D9"/>
-                      </a:solidFill>
-                      <a:prstDash val="solid"/>
-                      <a:round/>
-                      <a:headEnd type="none" w="med" len="med"/>
-                      <a:tailEnd type="none" w="med" len="med"/>
-                    </a:lnL>
-                    <a:lnR w="9525" cap="flat" cmpd="sng" algn="ctr">
-                      <a:solidFill>
-                        <a:srgbClr val="D9D9D9"/>
-                      </a:solidFill>
-                      <a:prstDash val="solid"/>
-                      <a:round/>
-                      <a:headEnd type="none" w="med" len="med"/>
-                      <a:tailEnd type="none" w="med" len="med"/>
-                    </a:lnR>
-                    <a:lnT w="9525" cap="flat" cmpd="sng" algn="ctr">
-                      <a:solidFill>
-                        <a:srgbClr val="D9D9D9"/>
-                      </a:solidFill>
-                      <a:prstDash val="solid"/>
-                      <a:round/>
-                      <a:headEnd type="none" w="med" len="med"/>
-                      <a:tailEnd type="none" w="med" len="med"/>
-                    </a:lnT>
-                    <a:lnB w="9525" cap="flat" cmpd="sng" algn="ctr">
-                      <a:solidFill>
-                        <a:srgbClr val="D9D9D9"/>
-                      </a:solidFill>
-                      <a:prstDash val="solid"/>
-                      <a:round/>
-                      <a:headEnd type="none" w="med" len="med"/>
-                      <a:tailEnd type="none" w="med" len="med"/>
-                    </a:lnB>
-                    <a:solidFill>
-                      <a:srgbClr val="F4F7FF"/>
-                    </a:solidFill>
-                  </a:tcPr>
-                </a:tc>
-                <a:tc>
-                  <a:txBody>
-                    <a:bodyPr/>
-                    <a:lstStyle/>
-                    <a:p>
-                      <a:pPr algn="l">
-                        <a:buNone/>
-                      </a:pPr>
-                      <a:r>
-                        <a:rPr lang="ja-JP" altLang="en-US" sz="1100" b="1" dirty="0">
-                          <a:solidFill>
-                            <a:srgbClr val="1F285A"/>
-                          </a:solidFill>
-                          <a:latin typeface="メイリオ" panose="020B0604030504040204" pitchFamily="50" charset="-128"/>
-                          <a:ea typeface="メイリオ" panose="020B0604030504040204" pitchFamily="50" charset="-128"/>
-                        </a:rPr>
-                        <a:t>関係構築と商談に集中</a:t>
-                      </a:r>
-                      <a:endParaRPr lang="ja-JP" altLang="en-US" sz="1100" dirty="0"/>
-                    </a:p>
-                  </a:txBody>
-                  <a:tcPr marR="73152" marT="36576" marB="36576" anchor="ctr">
-                    <a:lnL w="9525" cap="flat" cmpd="sng" algn="ctr">
-                      <a:solidFill>
-                        <a:srgbClr val="D9D9D9"/>
-                      </a:solidFill>
-                      <a:prstDash val="solid"/>
-                      <a:round/>
-                      <a:headEnd type="none" w="med" len="med"/>
-                      <a:tailEnd type="none" w="med" len="med"/>
-                    </a:lnL>
-                    <a:lnR w="9525" cap="flat" cmpd="sng" algn="ctr">
-                      <a:solidFill>
-                        <a:srgbClr val="D9D9D9"/>
-                      </a:solidFill>
-                      <a:prstDash val="solid"/>
-                      <a:round/>
-                      <a:headEnd type="none" w="med" len="med"/>
-                      <a:tailEnd type="none" w="med" len="med"/>
-                    </a:lnR>
-                    <a:lnT w="9525" cap="flat" cmpd="sng" algn="ctr">
-                      <a:solidFill>
-                        <a:srgbClr val="D9D9D9"/>
-                      </a:solidFill>
-                      <a:prstDash val="solid"/>
-                      <a:round/>
-                      <a:headEnd type="none" w="med" len="med"/>
-                      <a:tailEnd type="none" w="med" len="med"/>
-                    </a:lnT>
-                    <a:lnB w="9525" cap="flat" cmpd="sng" algn="ctr">
-                      <a:solidFill>
-                        <a:srgbClr val="D9D9D9"/>
-                      </a:solidFill>
-                      <a:prstDash val="solid"/>
-                      <a:round/>
-                      <a:headEnd type="none" w="med" len="med"/>
-                      <a:tailEnd type="none" w="med" len="med"/>
-                    </a:lnB>
-                    <a:solidFill>
-                      <a:srgbClr val="FFFFFF"/>
-                    </a:solidFill>
-                  </a:tcPr>
-                </a:tc>
-                <a:tc>
-                  <a:txBody>
-                    <a:bodyPr/>
-                    <a:lstStyle/>
-                    <a:p>
-                      <a:pPr algn="l">
-                        <a:buNone/>
-                      </a:pPr>
-                      <a:r>
-                        <a:rPr lang="ja-JP" altLang="en-US" sz="1050" b="0" dirty="0">
-                          <a:solidFill>
-                            <a:srgbClr val="333333"/>
-                          </a:solidFill>
-                          <a:latin typeface="メイリオ" panose="020B0604030504040204" pitchFamily="50" charset="-128"/>
-                          <a:ea typeface="メイリオ" panose="020B0604030504040204" pitchFamily="50" charset="-128"/>
-                        </a:rPr>
-                        <a:t>・検討度が上がった方（配信への反応・質問）に個別チャットで対応</a:t>
-                      </a:r>
-                      <a:br>
-                        <a:rPr lang="ja-JP" altLang="en-US" sz="1050" b="0" dirty="0">
-                          <a:solidFill>
-                            <a:srgbClr val="333333"/>
-                          </a:solidFill>
-                          <a:latin typeface="メイリオ" panose="020B0604030504040204" pitchFamily="50" charset="-128"/>
-                          <a:ea typeface="メイリオ" panose="020B0604030504040204" pitchFamily="50" charset="-128"/>
-                        </a:rPr>
-                      </a:br>
-                      <a:r>
-                        <a:rPr lang="ja-JP" altLang="en-US" sz="1050" b="0" dirty="0">
-                          <a:solidFill>
-                            <a:srgbClr val="333333"/>
-                          </a:solidFill>
-                          <a:latin typeface="メイリオ" panose="020B0604030504040204" pitchFamily="50" charset="-128"/>
-                          <a:ea typeface="メイリオ" panose="020B0604030504040204" pitchFamily="50" charset="-128"/>
-                        </a:rPr>
-                        <a:t>・来場・商談へつなげる</a:t>
-                      </a:r>
-                      <a:endParaRPr lang="ja-JP" altLang="en-US" sz="1050" dirty="0"/>
-                    </a:p>
-                  </a:txBody>
-                  <a:tcPr marR="73152" marT="36576" marB="36576" anchor="ctr">
-                    <a:lnL w="9525" cap="flat" cmpd="sng" algn="ctr">
-                      <a:solidFill>
-                        <a:srgbClr val="D9D9D9"/>
-                      </a:solidFill>
-                      <a:prstDash val="solid"/>
-                      <a:round/>
-                      <a:headEnd type="none" w="med" len="med"/>
-                      <a:tailEnd type="none" w="med" len="med"/>
-                    </a:lnL>
-                    <a:lnR w="9525" cap="flat" cmpd="sng" algn="ctr">
-                      <a:solidFill>
-                        <a:srgbClr val="D9D9D9"/>
-                      </a:solidFill>
-                      <a:prstDash val="solid"/>
-                      <a:round/>
-                      <a:headEnd type="none" w="med" len="med"/>
-                      <a:tailEnd type="none" w="med" len="med"/>
-                    </a:lnR>
-                    <a:lnT w="9525" cap="flat" cmpd="sng" algn="ctr">
-                      <a:solidFill>
-                        <a:srgbClr val="D9D9D9"/>
-                      </a:solidFill>
-                      <a:prstDash val="solid"/>
-                      <a:round/>
-                      <a:headEnd type="none" w="med" len="med"/>
-                      <a:tailEnd type="none" w="med" len="med"/>
-                    </a:lnT>
-                    <a:lnB w="9525" cap="flat" cmpd="sng" algn="ctr">
-                      <a:solidFill>
-                        <a:srgbClr val="D9D9D9"/>
-                      </a:solidFill>
-                      <a:prstDash val="solid"/>
-                      <a:round/>
-                      <a:headEnd type="none" w="med" len="med"/>
-                      <a:tailEnd type="none" w="med" len="med"/>
-                    </a:lnB>
-                    <a:solidFill>
-                      <a:srgbClr val="FFFFFF"/>
-                    </a:solidFill>
-                  </a:tcPr>
-                </a:tc>
-                <a:extLst>
-                  <a:ext uri="{0D108BD9-81ED-4DB2-BD59-A6C34878D82A}">
-                    <a16:rowId xmlns:a16="http://schemas.microsoft.com/office/drawing/2014/main" val="10001"/>
-                  </a:ext>
-                </a:extLst>
-              </a:tr>
-              <a:tr h="1097280">
-                <a:tc>
-                  <a:txBody>
-                    <a:bodyPr/>
-                    <a:lstStyle/>
-                    <a:p>
-                      <a:pPr algn="ctr">
-                        <a:buNone/>
-                      </a:pPr>
-                      <a:r>
-                        <a:rPr lang="ja-JP" altLang="en-US" sz="1150" b="1" dirty="0">
-                          <a:solidFill>
-                            <a:srgbClr val="1F285A"/>
-                          </a:solidFill>
-                          <a:latin typeface="メイリオ" panose="020B0604030504040204" pitchFamily="50" charset="-128"/>
-                          <a:ea typeface="メイリオ" panose="020B0604030504040204" pitchFamily="50" charset="-128"/>
-                        </a:rPr>
-                        <a:t>事務</a:t>
-                      </a:r>
-                      <a:br>
-                        <a:rPr lang="ja-JP" altLang="en-US" sz="1150" b="1" dirty="0">
-                          <a:solidFill>
-                            <a:srgbClr val="1F285A"/>
-                          </a:solidFill>
-                          <a:latin typeface="メイリオ" panose="020B0604030504040204" pitchFamily="50" charset="-128"/>
-                          <a:ea typeface="メイリオ" panose="020B0604030504040204" pitchFamily="50" charset="-128"/>
-                        </a:rPr>
-                      </a:br>
-                      <a:r>
-                        <a:rPr lang="ja-JP" altLang="en-US" sz="1150" b="1" dirty="0">
-                          <a:solidFill>
-                            <a:srgbClr val="1F285A"/>
-                          </a:solidFill>
-                          <a:latin typeface="メイリオ" panose="020B0604030504040204" pitchFamily="50" charset="-128"/>
-                          <a:ea typeface="メイリオ" panose="020B0604030504040204" pitchFamily="50" charset="-128"/>
-                        </a:rPr>
-                        <a:t>（数字の管理）</a:t>
-                      </a:r>
-                      <a:endParaRPr lang="ja-JP" altLang="en-US" sz="1150" dirty="0"/>
-                    </a:p>
-                  </a:txBody>
-                  <a:tcPr marR="73152" marT="36576" marB="36576" anchor="ctr">
-                    <a:lnL w="9525" cap="flat" cmpd="sng" algn="ctr">
-                      <a:solidFill>
-                        <a:srgbClr val="D9D9D9"/>
-                      </a:solidFill>
-                      <a:prstDash val="solid"/>
-                      <a:round/>
-                      <a:headEnd type="none" w="med" len="med"/>
-                      <a:tailEnd type="none" w="med" len="med"/>
-                    </a:lnL>
-                    <a:lnR w="9525" cap="flat" cmpd="sng" algn="ctr">
-                      <a:solidFill>
-                        <a:srgbClr val="D9D9D9"/>
-                      </a:solidFill>
-                      <a:prstDash val="solid"/>
-                      <a:round/>
-                      <a:headEnd type="none" w="med" len="med"/>
-                      <a:tailEnd type="none" w="med" len="med"/>
-                    </a:lnR>
-                    <a:lnT w="9525" cap="flat" cmpd="sng" algn="ctr">
-                      <a:solidFill>
-                        <a:srgbClr val="D9D9D9"/>
-                      </a:solidFill>
-                      <a:prstDash val="solid"/>
-                      <a:round/>
-                      <a:headEnd type="none" w="med" len="med"/>
-                      <a:tailEnd type="none" w="med" len="med"/>
-                    </a:lnT>
-                    <a:lnB w="9525" cap="flat" cmpd="sng" algn="ctr">
-                      <a:solidFill>
-                        <a:srgbClr val="D9D9D9"/>
-                      </a:solidFill>
-                      <a:prstDash val="solid"/>
-                      <a:round/>
-                      <a:headEnd type="none" w="med" len="med"/>
-                      <a:tailEnd type="none" w="med" len="med"/>
-                    </a:lnB>
-                    <a:solidFill>
-                      <a:srgbClr val="F4F7FF"/>
-                    </a:solidFill>
-                  </a:tcPr>
-                </a:tc>
-                <a:tc>
-                  <a:txBody>
-                    <a:bodyPr/>
-                    <a:lstStyle/>
-                    <a:p>
-                      <a:pPr algn="l">
-                        <a:buNone/>
-                      </a:pPr>
-                      <a:r>
-                        <a:rPr lang="ja-JP" altLang="en-US" sz="1100" b="1" dirty="0">
-                          <a:solidFill>
-                            <a:srgbClr val="1F285A"/>
-                          </a:solidFill>
-                          <a:latin typeface="メイリオ" panose="020B0604030504040204" pitchFamily="50" charset="-128"/>
-                          <a:ea typeface="メイリオ" panose="020B0604030504040204" pitchFamily="50" charset="-128"/>
-                        </a:rPr>
-                        <a:t>配信の管理と</a:t>
-                      </a:r>
-                      <a:br>
-                        <a:rPr lang="ja-JP" altLang="en-US" sz="1100" b="1" dirty="0">
-                          <a:solidFill>
-                            <a:srgbClr val="1F285A"/>
-                          </a:solidFill>
-                          <a:latin typeface="メイリオ" panose="020B0604030504040204" pitchFamily="50" charset="-128"/>
-                          <a:ea typeface="メイリオ" panose="020B0604030504040204" pitchFamily="50" charset="-128"/>
-                        </a:rPr>
-                      </a:br>
-                      <a:r>
-                        <a:rPr lang="ja-JP" altLang="en-US" sz="1100" b="1" dirty="0">
-                          <a:solidFill>
-                            <a:srgbClr val="1F285A"/>
-                          </a:solidFill>
-                          <a:latin typeface="メイリオ" panose="020B0604030504040204" pitchFamily="50" charset="-128"/>
-                          <a:ea typeface="メイリオ" panose="020B0604030504040204" pitchFamily="50" charset="-128"/>
-                        </a:rPr>
-                        <a:t>顧客リストの可視化</a:t>
-                      </a:r>
-                      <a:endParaRPr lang="ja-JP" altLang="en-US" sz="1100" dirty="0"/>
-                    </a:p>
-                  </a:txBody>
-                  <a:tcPr marR="73152" marT="36576" marB="36576" anchor="ctr">
-                    <a:lnL w="9525" cap="flat" cmpd="sng" algn="ctr">
-                      <a:solidFill>
-                        <a:srgbClr val="D9D9D9"/>
-                      </a:solidFill>
-                      <a:prstDash val="solid"/>
-                      <a:round/>
-                      <a:headEnd type="none" w="med" len="med"/>
-                      <a:tailEnd type="none" w="med" len="med"/>
-                    </a:lnL>
-                    <a:lnR w="9525" cap="flat" cmpd="sng" algn="ctr">
-                      <a:solidFill>
-                        <a:srgbClr val="D9D9D9"/>
-                      </a:solidFill>
-                      <a:prstDash val="solid"/>
-                      <a:round/>
-                      <a:headEnd type="none" w="med" len="med"/>
-                      <a:tailEnd type="none" w="med" len="med"/>
-                    </a:lnR>
-                    <a:lnT w="9525" cap="flat" cmpd="sng" algn="ctr">
-                      <a:solidFill>
-                        <a:srgbClr val="D9D9D9"/>
-                      </a:solidFill>
-                      <a:prstDash val="solid"/>
-                      <a:round/>
-                      <a:headEnd type="none" w="med" len="med"/>
-                      <a:tailEnd type="none" w="med" len="med"/>
-                    </a:lnT>
-                    <a:lnB w="9525" cap="flat" cmpd="sng" algn="ctr">
-                      <a:solidFill>
-                        <a:srgbClr val="D9D9D9"/>
-                      </a:solidFill>
-                      <a:prstDash val="solid"/>
-                      <a:round/>
-                      <a:headEnd type="none" w="med" len="med"/>
-                      <a:tailEnd type="none" w="med" len="med"/>
-                    </a:lnB>
-                    <a:solidFill>
-                      <a:srgbClr val="FFFFFF"/>
-                    </a:solidFill>
-                  </a:tcPr>
-                </a:tc>
-                <a:tc>
-                  <a:txBody>
-                    <a:bodyPr/>
-                    <a:lstStyle/>
-                    <a:p>
-                      <a:pPr algn="l">
-                        <a:buNone/>
-                      </a:pPr>
-                      <a:r>
-                        <a:rPr lang="ja-JP" altLang="en-US" sz="1050" b="0" dirty="0">
-                          <a:solidFill>
-                            <a:srgbClr val="333333"/>
-                          </a:solidFill>
-                          <a:latin typeface="メイリオ" panose="020B0604030504040204" pitchFamily="50" charset="-128"/>
-                          <a:ea typeface="メイリオ" panose="020B0604030504040204" pitchFamily="50" charset="-128"/>
-                        </a:rPr>
-                        <a:t>・配信の予約と反応（開封・クリック）の確認</a:t>
-                      </a:r>
-                      <a:br>
-                        <a:rPr lang="ja-JP" altLang="en-US" sz="1050" b="0" dirty="0">
-                          <a:solidFill>
-                            <a:srgbClr val="333333"/>
-                          </a:solidFill>
-                          <a:latin typeface="メイリオ" panose="020B0604030504040204" pitchFamily="50" charset="-128"/>
-                          <a:ea typeface="メイリオ" panose="020B0604030504040204" pitchFamily="50" charset="-128"/>
-                        </a:rPr>
-                      </a:br>
-                      <a:r>
-                        <a:rPr lang="ja-JP" altLang="en-US" sz="1050" b="0" dirty="0">
-                          <a:solidFill>
-                            <a:srgbClr val="333333"/>
-                          </a:solidFill>
-                          <a:latin typeface="メイリオ" panose="020B0604030504040204" pitchFamily="50" charset="-128"/>
-                          <a:ea typeface="メイリオ" panose="020B0604030504040204" pitchFamily="50" charset="-128"/>
-                        </a:rPr>
-                        <a:t>・チャットタグで検討状況を管理（検討中・予約済・来場済）</a:t>
-                      </a:r>
-                      <a:br>
-                        <a:rPr lang="ja-JP" altLang="en-US" sz="1050" b="0" dirty="0">
-                          <a:solidFill>
-                            <a:srgbClr val="333333"/>
-                          </a:solidFill>
-                          <a:latin typeface="メイリオ" panose="020B0604030504040204" pitchFamily="50" charset="-128"/>
-                          <a:ea typeface="メイリオ" panose="020B0604030504040204" pitchFamily="50" charset="-128"/>
-                        </a:rPr>
-                      </a:br>
-                      <a:r>
-                        <a:rPr lang="ja-JP" altLang="en-US" sz="1050" b="0" dirty="0">
-                          <a:solidFill>
-                            <a:srgbClr val="333333"/>
-                          </a:solidFill>
-                          <a:latin typeface="メイリオ" panose="020B0604030504040204" pitchFamily="50" charset="-128"/>
-                          <a:ea typeface="メイリオ" panose="020B0604030504040204" pitchFamily="50" charset="-128"/>
-                        </a:rPr>
-                        <a:t>・来場予約の3日前・前日のリマインド配信（キャンセル対策）</a:t>
-                      </a:r>
-                      <a:endParaRPr lang="ja-JP" altLang="en-US" sz="1050" dirty="0"/>
-                    </a:p>
-                  </a:txBody>
-                  <a:tcPr marR="73152" marT="36576" marB="36576" anchor="ctr">
-                    <a:lnL w="9525" cap="flat" cmpd="sng" algn="ctr">
-                      <a:solidFill>
-                        <a:srgbClr val="D9D9D9"/>
-                      </a:solidFill>
-                      <a:prstDash val="solid"/>
-                      <a:round/>
-                      <a:headEnd type="none" w="med" len="med"/>
-                      <a:tailEnd type="none" w="med" len="med"/>
-                    </a:lnL>
-                    <a:lnR w="9525" cap="flat" cmpd="sng" algn="ctr">
-                      <a:solidFill>
-                        <a:srgbClr val="D9D9D9"/>
-                      </a:solidFill>
-                      <a:prstDash val="solid"/>
-                      <a:round/>
-                      <a:headEnd type="none" w="med" len="med"/>
-                      <a:tailEnd type="none" w="med" len="med"/>
-                    </a:lnR>
-                    <a:lnT w="9525" cap="flat" cmpd="sng" algn="ctr">
-                      <a:solidFill>
-                        <a:srgbClr val="D9D9D9"/>
-                      </a:solidFill>
-                      <a:prstDash val="solid"/>
-                      <a:round/>
-                      <a:headEnd type="none" w="med" len="med"/>
-                      <a:tailEnd type="none" w="med" len="med"/>
-                    </a:lnT>
-                    <a:lnB w="9525" cap="flat" cmpd="sng" algn="ctr">
-                      <a:solidFill>
-                        <a:srgbClr val="D9D9D9"/>
-                      </a:solidFill>
-                      <a:prstDash val="solid"/>
-                      <a:round/>
-                      <a:headEnd type="none" w="med" len="med"/>
-                      <a:tailEnd type="none" w="med" len="med"/>
-                    </a:lnB>
-                    <a:solidFill>
-                      <a:srgbClr val="FFFFFF"/>
-                    </a:solidFill>
-                  </a:tcPr>
-                </a:tc>
-                <a:extLst>
-                  <a:ext uri="{0D108BD9-81ED-4DB2-BD59-A6C34878D82A}">
-                    <a16:rowId xmlns:a16="http://schemas.microsoft.com/office/drawing/2014/main" val="10002"/>
-                  </a:ext>
-                </a:extLst>
-              </a:tr>
-              <a:tr h="868680">
-                <a:tc>
-                  <a:txBody>
-                    <a:bodyPr/>
-                    <a:lstStyle/>
-                    <a:p>
-                      <a:pPr algn="ctr">
-                        <a:buNone/>
-                      </a:pPr>
-                      <a:r>
-                        <a:rPr lang="ja-JP" altLang="en-US" sz="1150" b="1" dirty="0">
-                          <a:solidFill>
-                            <a:srgbClr val="1F285A"/>
-                          </a:solidFill>
-                          <a:latin typeface="メイリオ" panose="020B0604030504040204" pitchFamily="50" charset="-128"/>
-                          <a:ea typeface="メイリオ" panose="020B0604030504040204" pitchFamily="50" charset="-128"/>
-                        </a:rPr>
-                        <a:t>弊社</a:t>
-                      </a:r>
-                      <a:endParaRPr lang="ja-JP" altLang="en-US" sz="1150" dirty="0"/>
-                    </a:p>
-                  </a:txBody>
-                  <a:tcPr marR="73152" marT="36576" marB="36576" anchor="ctr">
-                    <a:lnL w="9525" cap="flat" cmpd="sng" algn="ctr">
-                      <a:solidFill>
-                        <a:srgbClr val="D9D9D9"/>
-                      </a:solidFill>
-                      <a:prstDash val="solid"/>
-                      <a:round/>
-                      <a:headEnd type="none" w="med" len="med"/>
-                      <a:tailEnd type="none" w="med" len="med"/>
-                    </a:lnL>
-                    <a:lnR w="9525" cap="flat" cmpd="sng" algn="ctr">
-                      <a:solidFill>
-                        <a:srgbClr val="D9D9D9"/>
-                      </a:solidFill>
-                      <a:prstDash val="solid"/>
-                      <a:round/>
-                      <a:headEnd type="none" w="med" len="med"/>
-                      <a:tailEnd type="none" w="med" len="med"/>
-                    </a:lnR>
-                    <a:lnT w="9525" cap="flat" cmpd="sng" algn="ctr">
-                      <a:solidFill>
-                        <a:srgbClr val="D9D9D9"/>
-                      </a:solidFill>
-                      <a:prstDash val="solid"/>
-                      <a:round/>
-                      <a:headEnd type="none" w="med" len="med"/>
-                      <a:tailEnd type="none" w="med" len="med"/>
-                    </a:lnT>
-                    <a:lnB w="9525" cap="flat" cmpd="sng" algn="ctr">
-                      <a:solidFill>
-                        <a:srgbClr val="D9D9D9"/>
-                      </a:solidFill>
-                      <a:prstDash val="solid"/>
-                      <a:round/>
-                      <a:headEnd type="none" w="med" len="med"/>
-                      <a:tailEnd type="none" w="med" len="med"/>
-                    </a:lnB>
-                    <a:solidFill>
-                      <a:srgbClr val="F4F7FF"/>
-                    </a:solidFill>
-                  </a:tcPr>
-                </a:tc>
-                <a:tc>
-                  <a:txBody>
-                    <a:bodyPr/>
-                    <a:lstStyle/>
-                    <a:p>
-                      <a:pPr algn="l">
-                        <a:buNone/>
-                      </a:pPr>
-                      <a:r>
-                        <a:rPr lang="ja-JP" altLang="en-US" sz="1100" b="1" dirty="0">
-                          <a:solidFill>
-                            <a:srgbClr val="1F285A"/>
-                          </a:solidFill>
-                          <a:latin typeface="メイリオ" panose="020B0604030504040204" pitchFamily="50" charset="-128"/>
-                          <a:ea typeface="メイリオ" panose="020B0604030504040204" pitchFamily="50" charset="-128"/>
-                        </a:rPr>
-                        <a:t>配信の設計・制作・分析</a:t>
-                      </a:r>
-                      <a:endParaRPr lang="ja-JP" altLang="en-US" sz="1100" dirty="0"/>
-                    </a:p>
-                  </a:txBody>
-                  <a:tcPr marR="73152" marT="36576" marB="36576" anchor="ctr">
-                    <a:lnL w="9525" cap="flat" cmpd="sng" algn="ctr">
-                      <a:solidFill>
-                        <a:srgbClr val="D9D9D9"/>
-                      </a:solidFill>
-                      <a:prstDash val="solid"/>
-                      <a:round/>
-                      <a:headEnd type="none" w="med" len="med"/>
-                      <a:tailEnd type="none" w="med" len="med"/>
-                    </a:lnL>
-                    <a:lnR w="9525" cap="flat" cmpd="sng" algn="ctr">
-                      <a:solidFill>
-                        <a:srgbClr val="D9D9D9"/>
-                      </a:solidFill>
-                      <a:prstDash val="solid"/>
-                      <a:round/>
-                      <a:headEnd type="none" w="med" len="med"/>
-                      <a:tailEnd type="none" w="med" len="med"/>
-                    </a:lnR>
-                    <a:lnT w="9525" cap="flat" cmpd="sng" algn="ctr">
-                      <a:solidFill>
-                        <a:srgbClr val="D9D9D9"/>
-                      </a:solidFill>
-                      <a:prstDash val="solid"/>
-                      <a:round/>
-                      <a:headEnd type="none" w="med" len="med"/>
-                      <a:tailEnd type="none" w="med" len="med"/>
-                    </a:lnT>
-                    <a:lnB w="9525" cap="flat" cmpd="sng" algn="ctr">
-                      <a:solidFill>
-                        <a:srgbClr val="D9D9D9"/>
-                      </a:solidFill>
-                      <a:prstDash val="solid"/>
-                      <a:round/>
-                      <a:headEnd type="none" w="med" len="med"/>
-                      <a:tailEnd type="none" w="med" len="med"/>
-                    </a:lnB>
-                    <a:solidFill>
-                      <a:srgbClr val="FFFFFF"/>
-                    </a:solidFill>
-                  </a:tcPr>
-                </a:tc>
-                <a:tc>
-                  <a:txBody>
-                    <a:bodyPr/>
-                    <a:lstStyle/>
-                    <a:p>
-                      <a:pPr algn="l">
-                        <a:buNone/>
-                      </a:pPr>
-                      <a:r>
-                        <a:rPr lang="ja-JP" altLang="en-US" sz="1050" b="0" dirty="0">
-                          <a:solidFill>
-                            <a:srgbClr val="333333"/>
-                          </a:solidFill>
-                          <a:latin typeface="メイリオ" panose="020B0604030504040204" pitchFamily="50" charset="-128"/>
-                          <a:ea typeface="メイリオ" panose="020B0604030504040204" pitchFamily="50" charset="-128"/>
-                        </a:rPr>
-                        <a:t>・配信の企画と、文面・画像の制作</a:t>
-                      </a:r>
-                      <a:br>
-                        <a:rPr lang="ja-JP" altLang="en-US" sz="1050" b="0" dirty="0">
-                          <a:solidFill>
-                            <a:srgbClr val="333333"/>
-                          </a:solidFill>
-                          <a:latin typeface="メイリオ" panose="020B0604030504040204" pitchFamily="50" charset="-128"/>
-                          <a:ea typeface="メイリオ" panose="020B0604030504040204" pitchFamily="50" charset="-128"/>
-                        </a:rPr>
-                      </a:br>
-                      <a:r>
-                        <a:rPr lang="ja-JP" altLang="en-US" sz="1050" b="0" dirty="0">
-                          <a:solidFill>
-                            <a:srgbClr val="333333"/>
-                          </a:solidFill>
-                          <a:latin typeface="メイリオ" panose="020B0604030504040204" pitchFamily="50" charset="-128"/>
-                          <a:ea typeface="メイリオ" panose="020B0604030504040204" pitchFamily="50" charset="-128"/>
-                        </a:rPr>
-                        <a:t>・月次で友だち数・反応・来場予約を分析し、配信を改善</a:t>
-                      </a:r>
-                      <a:endParaRPr lang="ja-JP" altLang="en-US" sz="1050" dirty="0"/>
-                    </a:p>
-                  </a:txBody>
-                  <a:tcPr marR="73152" marT="36576" marB="36576" anchor="ctr">
-                    <a:lnL w="9525" cap="flat" cmpd="sng" algn="ctr">
-                      <a:solidFill>
-                        <a:srgbClr val="D9D9D9"/>
-                      </a:solidFill>
-                      <a:prstDash val="solid"/>
-                      <a:round/>
-                      <a:headEnd type="none" w="med" len="med"/>
-                      <a:tailEnd type="none" w="med" len="med"/>
-                    </a:lnL>
-                    <a:lnR w="9525" cap="flat" cmpd="sng" algn="ctr">
-                      <a:solidFill>
-                        <a:srgbClr val="D9D9D9"/>
-                      </a:solidFill>
-                      <a:prstDash val="solid"/>
-                      <a:round/>
-                      <a:headEnd type="none" w="med" len="med"/>
-                      <a:tailEnd type="none" w="med" len="med"/>
-                    </a:lnR>
-                    <a:lnT w="9525" cap="flat" cmpd="sng" algn="ctr">
-                      <a:solidFill>
-                        <a:srgbClr val="D9D9D9"/>
-                      </a:solidFill>
-                      <a:prstDash val="solid"/>
-                      <a:round/>
-                      <a:headEnd type="none" w="med" len="med"/>
-                      <a:tailEnd type="none" w="med" len="med"/>
-                    </a:lnT>
-                    <a:lnB w="9525" cap="flat" cmpd="sng" algn="ctr">
-                      <a:solidFill>
-                        <a:srgbClr val="D9D9D9"/>
-                      </a:solidFill>
-                      <a:prstDash val="solid"/>
-                      <a:round/>
-                      <a:headEnd type="none" w="med" len="med"/>
-                      <a:tailEnd type="none" w="med" len="med"/>
-                    </a:lnB>
-                    <a:solidFill>
-                      <a:srgbClr val="FFFFFF"/>
-                    </a:solidFill>
-                  </a:tcPr>
-                </a:tc>
-                <a:extLst>
-                  <a:ext uri="{0D108BD9-81ED-4DB2-BD59-A6C34878D82A}">
-                    <a16:rowId xmlns:a16="http://schemas.microsoft.com/office/drawing/2014/main" val="10003"/>
-                  </a:ext>
-                </a:extLst>
-              </a:tr>
-            </a:tbl>
-          </a:graphicData>
-        </a:graphic>
-      </p:graphicFrame>
-      <p:sp>
-        <p:nvSpPr>
-          <p:cNvPr id="8" name="示唆"/>
-          <p:cNvSpPr/>
-          <p:nvPr/>
-        </p:nvSpPr>
-        <p:spPr>
-          <a:xfrm>
-            <a:off x="502920" y="5074920"/>
-            <a:ext cx="8897112" cy="566928"/>
-          </a:xfrm>
-          <a:prstGeom prst="rect">
-            <a:avLst/>
-          </a:prstGeom>
-          <a:solidFill>
-            <a:srgbClr val="F4F7FF"/>
-          </a:solidFill>
-          <a:ln>
-            <a:noFill/>
-          </a:ln>
-        </p:spPr>
-        <p:txBody>
-          <a:bodyPr wrap="square" lIns="73152" tIns="36576" rIns="73152" bIns="36576" rtlCol="0" anchor="ctr">
-            <a:noAutofit/>
-          </a:bodyPr>
-          <a:lstStyle/>
-          <a:p>
-            <a:pPr algn="ctr">
-              <a:buNone/>
-            </a:pPr>
-            <a:r>
-              <a:rPr lang="ja-JP" altLang="en-US" sz="1300" b="1" dirty="0">
-                <a:solidFill>
-                  <a:srgbClr val="C00000"/>
-                </a:solidFill>
-                <a:latin typeface="メイリオ" panose="020B0604030504040204" pitchFamily="50" charset="-128"/>
-                <a:ea typeface="メイリオ" panose="020B0604030504040204" pitchFamily="50" charset="-128"/>
-              </a:rPr>
-              <a:t>属人化しない：</a:t>
-            </a:r>
-            <a:r>
-              <a:rPr lang="ja-JP" altLang="en-US" sz="1300" b="1" dirty="0">
-                <a:solidFill>
-                  <a:srgbClr val="1F285A"/>
-                </a:solidFill>
-                <a:latin typeface="メイリオ" panose="020B0604030504040204" pitchFamily="50" charset="-128"/>
-                <a:ea typeface="メイリオ" panose="020B0604030504040204" pitchFamily="50" charset="-128"/>
-              </a:rPr>
-              <a:t>担当が替わっても、同じ配信・同じ追客が続く仕組み</a:t>
-            </a:r>
-            <a:endParaRPr lang="ja-JP" altLang="en-US" sz="1200" dirty="0"/>
-          </a:p>
-        </p:txBody>
-      </p:sp>
-      <p:sp>
-        <p:nvSpPr>
-          <p:cNvPr id="9" name="注記"/>
-          <p:cNvSpPr/>
-          <p:nvPr/>
-        </p:nvSpPr>
-        <p:spPr>
-          <a:xfrm>
-            <a:off x="502920" y="5852160"/>
-            <a:ext cx="8897112" cy="274320"/>
-          </a:xfrm>
-          <a:prstGeom prst="rect">
-            <a:avLst/>
-          </a:prstGeom>
-          <a:noFill/>
-          <a:ln>
-            <a:noFill/>
-          </a:ln>
-        </p:spPr>
-        <p:txBody>
-          <a:bodyPr wrap="square" lIns="0" tIns="0" rIns="0" bIns="0" rtlCol="0" anchor="t">
-            <a:noAutofit/>
-          </a:bodyPr>
-          <a:lstStyle/>
-          <a:p>
-            <a:pPr algn="l">
-              <a:lnSpc>
-                <a:spcPct val="115000"/>
-              </a:lnSpc>
-              <a:buNone/>
-            </a:pPr>
-            <a:r>
-              <a:rPr lang="ja-JP" altLang="en-US" sz="900" b="0" dirty="0">
-                <a:solidFill>
-                  <a:srgbClr val="7F7F7F"/>
-                </a:solidFill>
-                <a:latin typeface="メイリオ" panose="020B0604030504040204" pitchFamily="50" charset="-128"/>
-                <a:ea typeface="メイリオ" panose="020B0604030504040204" pitchFamily="50" charset="-128"/>
-              </a:rPr>
-              <a:t>※来場予約のリマインドは、予約の受け方に合わせて設定（連携の方法は構築時に決定）</a:t>
-            </a:r>
-            <a:endParaRPr lang="ja-JP" altLang="en-US" sz="1200" dirty="0"/>
-          </a:p>
-        </p:txBody>
-      </p:sp>
-    </p:spTree>
-  </p:cSld>
-  <p:clrMapOvr>
-    <a:masterClrMapping/>
-  </p:clrMapOvr>
-</p:sld>
-</file>
-
 <file path=ppt/slides/slide6.xml><?xml version="1.0" encoding="utf-8"?>
 <p:sld xmlns:a="http://schemas.openxmlformats.org/drawingml/2006/main" xmlns:r="http://schemas.openxmlformats.org/officeDocument/2006/relationships" xmlns:p="http://schemas.openxmlformats.org/presentationml/2006/main">
   <p:cSld>

--- a/202610_タナカホーム株式会社御中_青森店受注最大化に向けたマーケティング戦略_v2.pptx
+++ b/202610_タナカホーム株式会社御中_青森店受注最大化に向けたマーケティング戦略_v2.pptx
@@ -12,6 +12,7 @@
     <p:sldId id="305" r:id="rId3"/>
     <p:sldId id="306" r:id="rId4"/>
     <p:sldId id="307" r:id="rId5"/>
+    <p:sldId id="308" r:id="rId6"/>
     <p:sldId id="309" r:id="rId7"/>
     <p:sldId id="301" r:id="rId8"/>
   </p:sldIdLst>
@@ -2427,7 +2428,7 @@
                 <a:latin typeface="メイリオ"/>
                 <a:ea typeface="メイリオ"/>
               </a:rPr>
-              <a:t>青森店の来場を増やすLINE活用のご提案</a:t>
+              <a:t>青森店 受注最大化に向けたマーケティング戦略</a:t>
             </a:r>
             <a:endParaRPr lang="en-US" sz="2600" b="0" u="none" strike="noStrike" dirty="0">
               <a:solidFill>
@@ -2491,7 +2492,7 @@
                 <a:latin typeface="メイリオ"/>
                 <a:ea typeface="メイリオ"/>
               </a:rPr>
-              <a:t>広告・SEOで集めた見込み客をファン化し、</a:t>
+              <a:t>集客強化から「ファン化・成約」へ繋げる</a:t>
             </a:r>
           </a:p>
           <a:p>
@@ -2509,7 +2510,7 @@
                 <a:latin typeface="メイリオ"/>
                 <a:ea typeface="メイリオ"/>
               </a:rPr>
-              <a:t>来場・成約につなげる</a:t>
+              <a:t>LINE活用のご提案</a:t>
             </a:r>
           </a:p>
         </p:txBody>
@@ -6798,6 +6799,1337 @@
                 <a:ea typeface="メイリオ" panose="020B0604030504040204" pitchFamily="50" charset="-128"/>
               </a:rPr>
               <a:t>※動画・写真はInstagram・Meta広告の素材を流用し、制作の負担を抑える／既存のLINE公式アカウントを活用</a:t>
+            </a:r>
+            <a:endParaRPr lang="ja-JP" altLang="en-US" sz="1200" dirty="0"/>
+          </a:p>
+        </p:txBody>
+      </p:sp>
+    </p:spTree>
+  </p:cSld>
+  <p:clrMapOvr>
+    <a:masterClrMapping/>
+  </p:clrMapOvr>
+</p:sld>
+</file>
+
+<file path=ppt/slides/slide5.xml><?xml version="1.0" encoding="utf-8"?>
+<p:sld xmlns:a="http://schemas.openxmlformats.org/drawingml/2006/main" xmlns:r="http://schemas.openxmlformats.org/officeDocument/2006/relationships" xmlns:p="http://schemas.openxmlformats.org/presentationml/2006/main">
+  <p:cSld>
+    <p:spTree>
+      <p:nvGrpSpPr>
+        <p:cNvPr id="1" name=""/>
+        <p:cNvGrpSpPr/>
+        <p:nvPr/>
+      </p:nvGrpSpPr>
+      <p:grpSpPr>
+        <a:xfrm>
+          <a:off x="0" y="0"/>
+          <a:ext cx="0" cy="0"/>
+          <a:chOff x="0" y="0"/>
+          <a:chExt cx="0" cy="0"/>
+        </a:xfrm>
+      </p:grpSpPr>
+      <p:sp>
+        <p:nvSpPr>
+          <p:cNvPr id="2" name="Google Shape;752;p28"/>
+          <p:cNvSpPr/>
+          <p:nvPr/>
+        </p:nvSpPr>
+        <p:spPr>
+          <a:xfrm>
+            <a:off x="549000" y="138240"/>
+            <a:ext cx="7680960" cy="338040"/>
+          </a:xfrm>
+          <a:prstGeom prst="rect">
+            <a:avLst/>
+          </a:prstGeom>
+          <a:noFill/>
+          <a:ln w="0">
+            <a:noFill/>
+          </a:ln>
+        </p:spPr>
+        <p:style>
+          <a:lnRef idx="0">
+            <a:scrgbClr r="0" g="0" b="0"/>
+          </a:lnRef>
+          <a:fillRef idx="0">
+            <a:scrgbClr r="0" g="0" b="0"/>
+          </a:fillRef>
+          <a:effectRef idx="0">
+            <a:scrgbClr r="0" g="0" b="0"/>
+          </a:effectRef>
+          <a:fontRef idx="minor"/>
+        </p:style>
+        <p:txBody>
+          <a:bodyPr anchor="ctr">
+            <a:spAutoFit/>
+          </a:bodyPr>
+          <a:lstStyle/>
+          <a:p>
+            <a:pPr defTabSz="914400">
+              <a:lnSpc>
+                <a:spcPct val="100000"/>
+              </a:lnSpc>
+            </a:pPr>
+            <a:r>
+              <a:rPr lang="ja-JP" sz="1600" b="1" u="none" strike="noStrike">
+                <a:solidFill>
+                  <a:srgbClr val="323366"/>
+                </a:solidFill>
+                <a:effectLst/>
+                <a:uFillTx/>
+                <a:latin typeface="メイリオ"/>
+                <a:ea typeface="メイリオ"/>
+              </a:rPr>
+              <a:t>現場体制：営業の追客の負担を減らし、事務との連携で数字を追う</a:t>
+            </a:r>
+            <a:endParaRPr lang="en-US" sz="1600" b="0" u="none" strike="noStrike">
+              <a:solidFill>
+                <a:srgbClr val="000000"/>
+              </a:solidFill>
+              <a:effectLst/>
+              <a:uFillTx/>
+              <a:latin typeface="メイリオ"/>
+            </a:endParaRPr>
+          </a:p>
+        </p:txBody>
+      </p:sp>
+      <p:sp>
+        <p:nvSpPr>
+          <p:cNvPr id="3" name="正方形/長方形 2"/>
+          <p:cNvSpPr/>
+          <p:nvPr/>
+        </p:nvSpPr>
+        <p:spPr>
+          <a:xfrm>
+            <a:off x="0" y="577800"/>
+            <a:ext cx="9905760" cy="812520"/>
+          </a:xfrm>
+          <a:prstGeom prst="rect">
+            <a:avLst/>
+          </a:prstGeom>
+          <a:noFill/>
+          <a:ln>
+            <a:noFill/>
+          </a:ln>
+          <a:effectLst>
+            <a:outerShdw blurRad="39960" dist="23040" dir="5400000" rotWithShape="0">
+              <a:srgbClr val="000000">
+                <a:alpha val="35000"/>
+              </a:srgbClr>
+            </a:outerShdw>
+          </a:effectLst>
+        </p:spPr>
+        <p:style>
+          <a:lnRef idx="1">
+            <a:schemeClr val="accent1"/>
+          </a:lnRef>
+          <a:fillRef idx="3">
+            <a:schemeClr val="accent1"/>
+          </a:fillRef>
+          <a:effectRef idx="2">
+            <a:schemeClr val="accent1"/>
+          </a:effectRef>
+          <a:fontRef idx="minor"/>
+        </p:style>
+        <p:txBody>
+          <a:bodyPr lIns="90000" tIns="45000" rIns="90000" bIns="45000" anchor="ctr">
+            <a:noAutofit/>
+          </a:bodyPr>
+          <a:lstStyle/>
+          <a:p>
+            <a:pPr algn="ctr" defTabSz="914400">
+              <a:lnSpc>
+                <a:spcPct val="100000"/>
+              </a:lnSpc>
+            </a:pPr>
+            <a:endParaRPr lang="en-US" sz="1800" b="0" u="none" strike="noStrike">
+              <a:solidFill>
+                <a:schemeClr val="lt1"/>
+              </a:solidFill>
+              <a:effectLst/>
+              <a:uFillTx/>
+              <a:latin typeface="メイリオ"/>
+              <a:ea typeface="メイリオ"/>
+            </a:endParaRPr>
+          </a:p>
+        </p:txBody>
+      </p:sp>
+      <p:sp>
+        <p:nvSpPr>
+          <p:cNvPr id="4" name="正方形/長方形 3"/>
+          <p:cNvSpPr/>
+          <p:nvPr/>
+        </p:nvSpPr>
+        <p:spPr>
+          <a:xfrm>
+            <a:off x="379800" y="635040"/>
+            <a:ext cx="9160560" cy="698040"/>
+          </a:xfrm>
+          <a:prstGeom prst="rect">
+            <a:avLst/>
+          </a:prstGeom>
+          <a:noFill/>
+          <a:ln>
+            <a:noFill/>
+          </a:ln>
+        </p:spPr>
+        <p:style>
+          <a:lnRef idx="2">
+            <a:schemeClr val="accent1">
+              <a:shade val="50000"/>
+            </a:schemeClr>
+          </a:lnRef>
+          <a:fillRef idx="1">
+            <a:schemeClr val="accent1"/>
+          </a:fillRef>
+          <a:effectRef idx="0">
+            <a:schemeClr val="accent1"/>
+          </a:effectRef>
+          <a:fontRef idx="minor"/>
+        </p:style>
+        <p:txBody>
+          <a:bodyPr lIns="90000" tIns="90000" rIns="90000" bIns="45000" anchor="ctr">
+            <a:noAutofit/>
+          </a:bodyPr>
+          <a:lstStyle/>
+          <a:p>
+            <a:pPr algn="ctr" defTabSz="914400">
+              <a:lnSpc>
+                <a:spcPts val="2455"/>
+              </a:lnSpc>
+            </a:pPr>
+            <a:endParaRPr lang="en-US" sz="1400" b="0" u="none" strike="noStrike">
+              <a:solidFill>
+                <a:srgbClr val="343434"/>
+              </a:solidFill>
+              <a:effectLst/>
+              <a:uFillTx/>
+              <a:latin typeface="メイリオ"/>
+              <a:ea typeface="メイリオ"/>
+            </a:endParaRPr>
+          </a:p>
+        </p:txBody>
+      </p:sp>
+      <p:cxnSp>
+        <p:nvCxnSpPr>
+          <p:cNvPr id="5" name="直線コネクタ 1"/>
+          <p:cNvCxnSpPr/>
+          <p:nvPr/>
+        </p:nvCxnSpPr>
+        <p:spPr>
+          <a:xfrm>
+            <a:off x="0" y="1390320"/>
+            <a:ext cx="9906120" cy="360"/>
+          </a:xfrm>
+          <a:prstGeom prst="straightConnector1">
+            <a:avLst/>
+          </a:prstGeom>
+          <a:ln w="19050">
+            <a:solidFill>
+              <a:schemeClr val="lt1">
+                <a:lumMod val="85000"/>
+                <a:alpha val="60000"/>
+              </a:schemeClr>
+            </a:solidFill>
+            <a:round/>
+          </a:ln>
+        </p:spPr>
+      </p:cxnSp>
+      <p:sp>
+        <p:nvSpPr>
+          <p:cNvPr id="6" name="テキスト ボックス 30"/>
+          <p:cNvSpPr/>
+          <p:nvPr/>
+        </p:nvSpPr>
+        <p:spPr>
+          <a:xfrm>
+            <a:off x="426240" y="635400"/>
+            <a:ext cx="9068760" cy="698400"/>
+          </a:xfrm>
+          <a:prstGeom prst="rect">
+            <a:avLst/>
+          </a:prstGeom>
+          <a:noFill/>
+          <a:ln w="0">
+            <a:noFill/>
+          </a:ln>
+        </p:spPr>
+        <p:style>
+          <a:lnRef idx="0">
+            <a:scrgbClr r="0" g="0" b="0"/>
+          </a:lnRef>
+          <a:fillRef idx="0">
+            <a:scrgbClr r="0" g="0" b="0"/>
+          </a:fillRef>
+          <a:effectRef idx="0">
+            <a:scrgbClr r="0" g="0" b="0"/>
+          </a:effectRef>
+          <a:fontRef idx="minor"/>
+        </p:style>
+        <p:txBody>
+          <a:bodyPr lIns="90000" tIns="45000" rIns="90000" bIns="45000" anchor="ctr">
+            <a:noAutofit/>
+          </a:bodyPr>
+          <a:lstStyle/>
+          <a:p>
+            <a:pPr algn="ctr" defTabSz="914400">
+              <a:lnSpc>
+                <a:spcPct val="100000"/>
+              </a:lnSpc>
+            </a:pPr>
+            <a:r>
+              <a:rPr lang="ja-JP" sz="1400" b="1" u="none" strike="noStrike" dirty="0">
+                <a:effectLst/>
+                <a:uFillTx/>
+                <a:latin typeface="メイリオ" panose="020B0604030504040204" pitchFamily="50" charset="-128"/>
+                <a:ea typeface="メイリオ" panose="020B0604030504040204" pitchFamily="50" charset="-128"/>
+              </a:rPr>
+              <a:t>営業は関係構築と商談に集中し、事務が配信と顧客リストの状況を管理する</a:t>
+            </a:r>
+            <a:endParaRPr lang="en-US" sz="1400" b="1" u="none" strike="noStrike" dirty="0">
+              <a:effectLst/>
+              <a:uFillTx/>
+              <a:latin typeface="メイリオ"/>
+            </a:endParaRPr>
+          </a:p>
+        </p:txBody>
+      </p:sp>
+      <p:graphicFrame>
+        <p:nvGraphicFramePr>
+          <p:cNvPr id="7" name="体制 6"/>
+          <p:cNvGraphicFramePr>
+            <a:graphicFrameLocks noGrp="1"/>
+          </p:cNvGraphicFramePr>
+          <p:nvPr/>
+        </p:nvGraphicFramePr>
+        <p:xfrm>
+          <a:off x="502920" y="1691640"/>
+          <a:ext cx="8897112" cy="3200400"/>
+        </p:xfrm>
+        <a:graphic>
+          <a:graphicData uri="http://schemas.openxmlformats.org/drawingml/2006/table">
+            <a:tbl>
+              <a:tblPr/>
+              <a:tblGrid>
+                <a:gridCol w="1371600">
+                  <a:extLst>
+                    <a:ext uri="{9D8B030D-6E8A-4147-A177-3AD203B41FA5}">
+                      <a16:colId xmlns:a16="http://schemas.microsoft.com/office/drawing/2014/main" val="20000"/>
+                    </a:ext>
+                  </a:extLst>
+                </a:gridCol>
+                <a:gridCol w="2194560">
+                  <a:extLst>
+                    <a:ext uri="{9D8B030D-6E8A-4147-A177-3AD203B41FA5}">
+                      <a16:colId xmlns:a16="http://schemas.microsoft.com/office/drawing/2014/main" val="20001"/>
+                    </a:ext>
+                  </a:extLst>
+                </a:gridCol>
+                <a:gridCol w="5330952">
+                  <a:extLst>
+                    <a:ext uri="{9D8B030D-6E8A-4147-A177-3AD203B41FA5}">
+                      <a16:colId xmlns:a16="http://schemas.microsoft.com/office/drawing/2014/main" val="20002"/>
+                    </a:ext>
+                  </a:extLst>
+                </a:gridCol>
+              </a:tblGrid>
+              <a:tr h="365760">
+                <a:tc>
+                  <a:txBody>
+                    <a:bodyPr/>
+                    <a:lstStyle/>
+                    <a:p>
+                      <a:pPr algn="ctr">
+                        <a:buNone/>
+                      </a:pPr>
+                      <a:r>
+                        <a:rPr lang="ja-JP" altLang="en-US" sz="1150" b="1" dirty="0">
+                          <a:solidFill>
+                            <a:srgbClr val="FFFFFF"/>
+                          </a:solidFill>
+                          <a:latin typeface="メイリオ" panose="020B0604030504040204" pitchFamily="50" charset="-128"/>
+                          <a:ea typeface="メイリオ" panose="020B0604030504040204" pitchFamily="50" charset="-128"/>
+                        </a:rPr>
+                        <a:t>担当</a:t>
+                      </a:r>
+                      <a:endParaRPr lang="ja-JP" altLang="en-US" sz="1150" dirty="0"/>
+                    </a:p>
+                  </a:txBody>
+                  <a:tcPr marL="73152" marR="73152" marT="27432" marB="27432" anchor="ctr">
+                    <a:lnL w="9525" cap="flat" cmpd="sng" algn="ctr">
+                      <a:solidFill>
+                        <a:srgbClr val="D9D9D9"/>
+                      </a:solidFill>
+                      <a:prstDash val="solid"/>
+                      <a:round/>
+                      <a:headEnd type="none" w="med" len="med"/>
+                      <a:tailEnd type="none" w="med" len="med"/>
+                    </a:lnL>
+                    <a:lnR w="9525" cap="flat" cmpd="sng" algn="ctr">
+                      <a:solidFill>
+                        <a:srgbClr val="D9D9D9"/>
+                      </a:solidFill>
+                      <a:prstDash val="solid"/>
+                      <a:round/>
+                      <a:headEnd type="none" w="med" len="med"/>
+                      <a:tailEnd type="none" w="med" len="med"/>
+                    </a:lnR>
+                    <a:lnT w="9525" cap="flat" cmpd="sng" algn="ctr">
+                      <a:solidFill>
+                        <a:srgbClr val="D9D9D9"/>
+                      </a:solidFill>
+                      <a:prstDash val="solid"/>
+                      <a:round/>
+                      <a:headEnd type="none" w="med" len="med"/>
+                      <a:tailEnd type="none" w="med" len="med"/>
+                    </a:lnT>
+                    <a:lnB w="9525" cap="flat" cmpd="sng" algn="ctr">
+                      <a:solidFill>
+                        <a:srgbClr val="D9D9D9"/>
+                      </a:solidFill>
+                      <a:prstDash val="solid"/>
+                      <a:round/>
+                      <a:headEnd type="none" w="med" len="med"/>
+                      <a:tailEnd type="none" w="med" len="med"/>
+                    </a:lnB>
+                    <a:solidFill>
+                      <a:srgbClr val="1F285A"/>
+                    </a:solidFill>
+                  </a:tcPr>
+                </a:tc>
+                <a:tc>
+                  <a:txBody>
+                    <a:bodyPr/>
+                    <a:lstStyle/>
+                    <a:p>
+                      <a:pPr algn="ctr">
+                        <a:buNone/>
+                      </a:pPr>
+                      <a:r>
+                        <a:rPr lang="ja-JP" altLang="en-US" sz="1150" b="1" dirty="0">
+                          <a:solidFill>
+                            <a:srgbClr val="FFFFFF"/>
+                          </a:solidFill>
+                          <a:latin typeface="メイリオ" panose="020B0604030504040204" pitchFamily="50" charset="-128"/>
+                          <a:ea typeface="メイリオ" panose="020B0604030504040204" pitchFamily="50" charset="-128"/>
+                        </a:rPr>
+                        <a:t>役割</a:t>
+                      </a:r>
+                      <a:endParaRPr lang="ja-JP" altLang="en-US" sz="1150" dirty="0"/>
+                    </a:p>
+                  </a:txBody>
+                  <a:tcPr marL="73152" marR="73152" marT="27432" marB="27432" anchor="ctr">
+                    <a:lnL w="9525" cap="flat" cmpd="sng" algn="ctr">
+                      <a:solidFill>
+                        <a:srgbClr val="D9D9D9"/>
+                      </a:solidFill>
+                      <a:prstDash val="solid"/>
+                      <a:round/>
+                      <a:headEnd type="none" w="med" len="med"/>
+                      <a:tailEnd type="none" w="med" len="med"/>
+                    </a:lnL>
+                    <a:lnR w="9525" cap="flat" cmpd="sng" algn="ctr">
+                      <a:solidFill>
+                        <a:srgbClr val="D9D9D9"/>
+                      </a:solidFill>
+                      <a:prstDash val="solid"/>
+                      <a:round/>
+                      <a:headEnd type="none" w="med" len="med"/>
+                      <a:tailEnd type="none" w="med" len="med"/>
+                    </a:lnR>
+                    <a:lnT w="9525" cap="flat" cmpd="sng" algn="ctr">
+                      <a:solidFill>
+                        <a:srgbClr val="D9D9D9"/>
+                      </a:solidFill>
+                      <a:prstDash val="solid"/>
+                      <a:round/>
+                      <a:headEnd type="none" w="med" len="med"/>
+                      <a:tailEnd type="none" w="med" len="med"/>
+                    </a:lnT>
+                    <a:lnB w="9525" cap="flat" cmpd="sng" algn="ctr">
+                      <a:solidFill>
+                        <a:srgbClr val="D9D9D9"/>
+                      </a:solidFill>
+                      <a:prstDash val="solid"/>
+                      <a:round/>
+                      <a:headEnd type="none" w="med" len="med"/>
+                      <a:tailEnd type="none" w="med" len="med"/>
+                    </a:lnB>
+                    <a:solidFill>
+                      <a:srgbClr val="1F285A"/>
+                    </a:solidFill>
+                  </a:tcPr>
+                </a:tc>
+                <a:tc>
+                  <a:txBody>
+                    <a:bodyPr/>
+                    <a:lstStyle/>
+                    <a:p>
+                      <a:pPr algn="ctr">
+                        <a:buNone/>
+                      </a:pPr>
+                      <a:r>
+                        <a:rPr lang="ja-JP" altLang="en-US" sz="1150" b="1" dirty="0">
+                          <a:solidFill>
+                            <a:srgbClr val="FFFFFF"/>
+                          </a:solidFill>
+                          <a:latin typeface="メイリオ" panose="020B0604030504040204" pitchFamily="50" charset="-128"/>
+                          <a:ea typeface="メイリオ" panose="020B0604030504040204" pitchFamily="50" charset="-128"/>
+                        </a:rPr>
+                        <a:t>LINEでやること</a:t>
+                      </a:r>
+                      <a:endParaRPr lang="ja-JP" altLang="en-US" sz="1150" dirty="0"/>
+                    </a:p>
+                  </a:txBody>
+                  <a:tcPr marL="73152" marR="73152" marT="27432" marB="27432" anchor="ctr">
+                    <a:lnL w="9525" cap="flat" cmpd="sng" algn="ctr">
+                      <a:solidFill>
+                        <a:srgbClr val="D9D9D9"/>
+                      </a:solidFill>
+                      <a:prstDash val="solid"/>
+                      <a:round/>
+                      <a:headEnd type="none" w="med" len="med"/>
+                      <a:tailEnd type="none" w="med" len="med"/>
+                    </a:lnL>
+                    <a:lnR w="9525" cap="flat" cmpd="sng" algn="ctr">
+                      <a:solidFill>
+                        <a:srgbClr val="D9D9D9"/>
+                      </a:solidFill>
+                      <a:prstDash val="solid"/>
+                      <a:round/>
+                      <a:headEnd type="none" w="med" len="med"/>
+                      <a:tailEnd type="none" w="med" len="med"/>
+                    </a:lnR>
+                    <a:lnT w="9525" cap="flat" cmpd="sng" algn="ctr">
+                      <a:solidFill>
+                        <a:srgbClr val="D9D9D9"/>
+                      </a:solidFill>
+                      <a:prstDash val="solid"/>
+                      <a:round/>
+                      <a:headEnd type="none" w="med" len="med"/>
+                      <a:tailEnd type="none" w="med" len="med"/>
+                    </a:lnT>
+                    <a:lnB w="9525" cap="flat" cmpd="sng" algn="ctr">
+                      <a:solidFill>
+                        <a:srgbClr val="D9D9D9"/>
+                      </a:solidFill>
+                      <a:prstDash val="solid"/>
+                      <a:round/>
+                      <a:headEnd type="none" w="med" len="med"/>
+                      <a:tailEnd type="none" w="med" len="med"/>
+                    </a:lnB>
+                    <a:solidFill>
+                      <a:srgbClr val="1F285A"/>
+                    </a:solidFill>
+                  </a:tcPr>
+                </a:tc>
+                <a:extLst>
+                  <a:ext uri="{0D108BD9-81ED-4DB2-BD59-A6C34878D82A}">
+                    <a16:rowId xmlns:a16="http://schemas.microsoft.com/office/drawing/2014/main" val="10000"/>
+                  </a:ext>
+                </a:extLst>
+              </a:tr>
+              <a:tr h="868680">
+                <a:tc>
+                  <a:txBody>
+                    <a:bodyPr/>
+                    <a:lstStyle/>
+                    <a:p>
+                      <a:pPr algn="ctr">
+                        <a:buNone/>
+                      </a:pPr>
+                      <a:r>
+                        <a:rPr lang="ja-JP" altLang="en-US" sz="1150" b="1" dirty="0">
+                          <a:solidFill>
+                            <a:srgbClr val="1F285A"/>
+                          </a:solidFill>
+                          <a:latin typeface="メイリオ" panose="020B0604030504040204" pitchFamily="50" charset="-128"/>
+                          <a:ea typeface="メイリオ" panose="020B0604030504040204" pitchFamily="50" charset="-128"/>
+                        </a:rPr>
+                        <a:t>営業</a:t>
+                      </a:r>
+                      <a:endParaRPr lang="ja-JP" altLang="en-US" sz="1150" dirty="0"/>
+                    </a:p>
+                  </a:txBody>
+                  <a:tcPr marR="73152" marT="36576" marB="36576" anchor="ctr">
+                    <a:lnL w="9525" cap="flat" cmpd="sng" algn="ctr">
+                      <a:solidFill>
+                        <a:srgbClr val="D9D9D9"/>
+                      </a:solidFill>
+                      <a:prstDash val="solid"/>
+                      <a:round/>
+                      <a:headEnd type="none" w="med" len="med"/>
+                      <a:tailEnd type="none" w="med" len="med"/>
+                    </a:lnL>
+                    <a:lnR w="9525" cap="flat" cmpd="sng" algn="ctr">
+                      <a:solidFill>
+                        <a:srgbClr val="D9D9D9"/>
+                      </a:solidFill>
+                      <a:prstDash val="solid"/>
+                      <a:round/>
+                      <a:headEnd type="none" w="med" len="med"/>
+                      <a:tailEnd type="none" w="med" len="med"/>
+                    </a:lnR>
+                    <a:lnT w="9525" cap="flat" cmpd="sng" algn="ctr">
+                      <a:solidFill>
+                        <a:srgbClr val="D9D9D9"/>
+                      </a:solidFill>
+                      <a:prstDash val="solid"/>
+                      <a:round/>
+                      <a:headEnd type="none" w="med" len="med"/>
+                      <a:tailEnd type="none" w="med" len="med"/>
+                    </a:lnT>
+                    <a:lnB w="9525" cap="flat" cmpd="sng" algn="ctr">
+                      <a:solidFill>
+                        <a:srgbClr val="D9D9D9"/>
+                      </a:solidFill>
+                      <a:prstDash val="solid"/>
+                      <a:round/>
+                      <a:headEnd type="none" w="med" len="med"/>
+                      <a:tailEnd type="none" w="med" len="med"/>
+                    </a:lnB>
+                    <a:solidFill>
+                      <a:srgbClr val="F4F7FF"/>
+                    </a:solidFill>
+                  </a:tcPr>
+                </a:tc>
+                <a:tc>
+                  <a:txBody>
+                    <a:bodyPr/>
+                    <a:lstStyle/>
+                    <a:p>
+                      <a:pPr algn="l">
+                        <a:buNone/>
+                      </a:pPr>
+                      <a:r>
+                        <a:rPr lang="ja-JP" altLang="en-US" sz="1100" b="1" dirty="0">
+                          <a:solidFill>
+                            <a:srgbClr val="1F285A"/>
+                          </a:solidFill>
+                          <a:latin typeface="メイリオ" panose="020B0604030504040204" pitchFamily="50" charset="-128"/>
+                          <a:ea typeface="メイリオ" panose="020B0604030504040204" pitchFamily="50" charset="-128"/>
+                        </a:rPr>
+                        <a:t>関係構築と商談に集中</a:t>
+                      </a:r>
+                      <a:endParaRPr lang="ja-JP" altLang="en-US" sz="1100" dirty="0"/>
+                    </a:p>
+                  </a:txBody>
+                  <a:tcPr marR="73152" marT="36576" marB="36576" anchor="ctr">
+                    <a:lnL w="9525" cap="flat" cmpd="sng" algn="ctr">
+                      <a:solidFill>
+                        <a:srgbClr val="D9D9D9"/>
+                      </a:solidFill>
+                      <a:prstDash val="solid"/>
+                      <a:round/>
+                      <a:headEnd type="none" w="med" len="med"/>
+                      <a:tailEnd type="none" w="med" len="med"/>
+                    </a:lnL>
+                    <a:lnR w="9525" cap="flat" cmpd="sng" algn="ctr">
+                      <a:solidFill>
+                        <a:srgbClr val="D9D9D9"/>
+                      </a:solidFill>
+                      <a:prstDash val="solid"/>
+                      <a:round/>
+                      <a:headEnd type="none" w="med" len="med"/>
+                      <a:tailEnd type="none" w="med" len="med"/>
+                    </a:lnR>
+                    <a:lnT w="9525" cap="flat" cmpd="sng" algn="ctr">
+                      <a:solidFill>
+                        <a:srgbClr val="D9D9D9"/>
+                      </a:solidFill>
+                      <a:prstDash val="solid"/>
+                      <a:round/>
+                      <a:headEnd type="none" w="med" len="med"/>
+                      <a:tailEnd type="none" w="med" len="med"/>
+                    </a:lnT>
+                    <a:lnB w="9525" cap="flat" cmpd="sng" algn="ctr">
+                      <a:solidFill>
+                        <a:srgbClr val="D9D9D9"/>
+                      </a:solidFill>
+                      <a:prstDash val="solid"/>
+                      <a:round/>
+                      <a:headEnd type="none" w="med" len="med"/>
+                      <a:tailEnd type="none" w="med" len="med"/>
+                    </a:lnB>
+                    <a:solidFill>
+                      <a:srgbClr val="FFFFFF"/>
+                    </a:solidFill>
+                  </a:tcPr>
+                </a:tc>
+                <a:tc>
+                  <a:txBody>
+                    <a:bodyPr/>
+                    <a:lstStyle/>
+                    <a:p>
+                      <a:pPr algn="l">
+                        <a:buNone/>
+                      </a:pPr>
+                      <a:r>
+                        <a:rPr lang="ja-JP" altLang="en-US" sz="1050" b="0" dirty="0">
+                          <a:solidFill>
+                            <a:srgbClr val="333333"/>
+                          </a:solidFill>
+                          <a:latin typeface="メイリオ" panose="020B0604030504040204" pitchFamily="50" charset="-128"/>
+                          <a:ea typeface="メイリオ" panose="020B0604030504040204" pitchFamily="50" charset="-128"/>
+                        </a:rPr>
+                        <a:t>・検討度が上がった方（配信への反応・質問）に個別チャットで対応</a:t>
+                      </a:r>
+                      <a:br>
+                        <a:rPr lang="ja-JP" altLang="en-US" sz="1050" b="0" dirty="0">
+                          <a:solidFill>
+                            <a:srgbClr val="333333"/>
+                          </a:solidFill>
+                          <a:latin typeface="メイリオ" panose="020B0604030504040204" pitchFamily="50" charset="-128"/>
+                          <a:ea typeface="メイリオ" panose="020B0604030504040204" pitchFamily="50" charset="-128"/>
+                        </a:rPr>
+                      </a:br>
+                      <a:r>
+                        <a:rPr lang="ja-JP" altLang="en-US" sz="1050" b="0" dirty="0">
+                          <a:solidFill>
+                            <a:srgbClr val="333333"/>
+                          </a:solidFill>
+                          <a:latin typeface="メイリオ" panose="020B0604030504040204" pitchFamily="50" charset="-128"/>
+                          <a:ea typeface="メイリオ" panose="020B0604030504040204" pitchFamily="50" charset="-128"/>
+                        </a:rPr>
+                        <a:t>・来場・商談へつなげる</a:t>
+                      </a:r>
+                      <a:endParaRPr lang="ja-JP" altLang="en-US" sz="1050" dirty="0"/>
+                    </a:p>
+                  </a:txBody>
+                  <a:tcPr marR="73152" marT="36576" marB="36576" anchor="ctr">
+                    <a:lnL w="9525" cap="flat" cmpd="sng" algn="ctr">
+                      <a:solidFill>
+                        <a:srgbClr val="D9D9D9"/>
+                      </a:solidFill>
+                      <a:prstDash val="solid"/>
+                      <a:round/>
+                      <a:headEnd type="none" w="med" len="med"/>
+                      <a:tailEnd type="none" w="med" len="med"/>
+                    </a:lnL>
+                    <a:lnR w="9525" cap="flat" cmpd="sng" algn="ctr">
+                      <a:solidFill>
+                        <a:srgbClr val="D9D9D9"/>
+                      </a:solidFill>
+                      <a:prstDash val="solid"/>
+                      <a:round/>
+                      <a:headEnd type="none" w="med" len="med"/>
+                      <a:tailEnd type="none" w="med" len="med"/>
+                    </a:lnR>
+                    <a:lnT w="9525" cap="flat" cmpd="sng" algn="ctr">
+                      <a:solidFill>
+                        <a:srgbClr val="D9D9D9"/>
+                      </a:solidFill>
+                      <a:prstDash val="solid"/>
+                      <a:round/>
+                      <a:headEnd type="none" w="med" len="med"/>
+                      <a:tailEnd type="none" w="med" len="med"/>
+                    </a:lnT>
+                    <a:lnB w="9525" cap="flat" cmpd="sng" algn="ctr">
+                      <a:solidFill>
+                        <a:srgbClr val="D9D9D9"/>
+                      </a:solidFill>
+                      <a:prstDash val="solid"/>
+                      <a:round/>
+                      <a:headEnd type="none" w="med" len="med"/>
+                      <a:tailEnd type="none" w="med" len="med"/>
+                    </a:lnB>
+                    <a:solidFill>
+                      <a:srgbClr val="FFFFFF"/>
+                    </a:solidFill>
+                  </a:tcPr>
+                </a:tc>
+                <a:extLst>
+                  <a:ext uri="{0D108BD9-81ED-4DB2-BD59-A6C34878D82A}">
+                    <a16:rowId xmlns:a16="http://schemas.microsoft.com/office/drawing/2014/main" val="10001"/>
+                  </a:ext>
+                </a:extLst>
+              </a:tr>
+              <a:tr h="1097280">
+                <a:tc>
+                  <a:txBody>
+                    <a:bodyPr/>
+                    <a:lstStyle/>
+                    <a:p>
+                      <a:pPr algn="ctr">
+                        <a:buNone/>
+                      </a:pPr>
+                      <a:r>
+                        <a:rPr lang="ja-JP" altLang="en-US" sz="1150" b="1" dirty="0">
+                          <a:solidFill>
+                            <a:srgbClr val="1F285A"/>
+                          </a:solidFill>
+                          <a:latin typeface="メイリオ" panose="020B0604030504040204" pitchFamily="50" charset="-128"/>
+                          <a:ea typeface="メイリオ" panose="020B0604030504040204" pitchFamily="50" charset="-128"/>
+                        </a:rPr>
+                        <a:t>事務</a:t>
+                      </a:r>
+                      <a:br>
+                        <a:rPr lang="ja-JP" altLang="en-US" sz="1150" b="1" dirty="0">
+                          <a:solidFill>
+                            <a:srgbClr val="1F285A"/>
+                          </a:solidFill>
+                          <a:latin typeface="メイリオ" panose="020B0604030504040204" pitchFamily="50" charset="-128"/>
+                          <a:ea typeface="メイリオ" panose="020B0604030504040204" pitchFamily="50" charset="-128"/>
+                        </a:rPr>
+                      </a:br>
+                      <a:r>
+                        <a:rPr lang="ja-JP" altLang="en-US" sz="1150" b="1" dirty="0">
+                          <a:solidFill>
+                            <a:srgbClr val="1F285A"/>
+                          </a:solidFill>
+                          <a:latin typeface="メイリオ" panose="020B0604030504040204" pitchFamily="50" charset="-128"/>
+                          <a:ea typeface="メイリオ" panose="020B0604030504040204" pitchFamily="50" charset="-128"/>
+                        </a:rPr>
+                        <a:t>（数字の管理）</a:t>
+                      </a:r>
+                      <a:endParaRPr lang="ja-JP" altLang="en-US" sz="1150" dirty="0"/>
+                    </a:p>
+                  </a:txBody>
+                  <a:tcPr marR="73152" marT="36576" marB="36576" anchor="ctr">
+                    <a:lnL w="9525" cap="flat" cmpd="sng" algn="ctr">
+                      <a:solidFill>
+                        <a:srgbClr val="D9D9D9"/>
+                      </a:solidFill>
+                      <a:prstDash val="solid"/>
+                      <a:round/>
+                      <a:headEnd type="none" w="med" len="med"/>
+                      <a:tailEnd type="none" w="med" len="med"/>
+                    </a:lnL>
+                    <a:lnR w="9525" cap="flat" cmpd="sng" algn="ctr">
+                      <a:solidFill>
+                        <a:srgbClr val="D9D9D9"/>
+                      </a:solidFill>
+                      <a:prstDash val="solid"/>
+                      <a:round/>
+                      <a:headEnd type="none" w="med" len="med"/>
+                      <a:tailEnd type="none" w="med" len="med"/>
+                    </a:lnR>
+                    <a:lnT w="9525" cap="flat" cmpd="sng" algn="ctr">
+                      <a:solidFill>
+                        <a:srgbClr val="D9D9D9"/>
+                      </a:solidFill>
+                      <a:prstDash val="solid"/>
+                      <a:round/>
+                      <a:headEnd type="none" w="med" len="med"/>
+                      <a:tailEnd type="none" w="med" len="med"/>
+                    </a:lnT>
+                    <a:lnB w="9525" cap="flat" cmpd="sng" algn="ctr">
+                      <a:solidFill>
+                        <a:srgbClr val="D9D9D9"/>
+                      </a:solidFill>
+                      <a:prstDash val="solid"/>
+                      <a:round/>
+                      <a:headEnd type="none" w="med" len="med"/>
+                      <a:tailEnd type="none" w="med" len="med"/>
+                    </a:lnB>
+                    <a:solidFill>
+                      <a:srgbClr val="F4F7FF"/>
+                    </a:solidFill>
+                  </a:tcPr>
+                </a:tc>
+                <a:tc>
+                  <a:txBody>
+                    <a:bodyPr/>
+                    <a:lstStyle/>
+                    <a:p>
+                      <a:pPr algn="l">
+                        <a:buNone/>
+                      </a:pPr>
+                      <a:r>
+                        <a:rPr lang="ja-JP" altLang="en-US" sz="1100" b="1" dirty="0">
+                          <a:solidFill>
+                            <a:srgbClr val="1F285A"/>
+                          </a:solidFill>
+                          <a:latin typeface="メイリオ" panose="020B0604030504040204" pitchFamily="50" charset="-128"/>
+                          <a:ea typeface="メイリオ" panose="020B0604030504040204" pitchFamily="50" charset="-128"/>
+                        </a:rPr>
+                        <a:t>配信の管理と</a:t>
+                      </a:r>
+                      <a:br>
+                        <a:rPr lang="ja-JP" altLang="en-US" sz="1100" b="1" dirty="0">
+                          <a:solidFill>
+                            <a:srgbClr val="1F285A"/>
+                          </a:solidFill>
+                          <a:latin typeface="メイリオ" panose="020B0604030504040204" pitchFamily="50" charset="-128"/>
+                          <a:ea typeface="メイリオ" panose="020B0604030504040204" pitchFamily="50" charset="-128"/>
+                        </a:rPr>
+                      </a:br>
+                      <a:r>
+                        <a:rPr lang="ja-JP" altLang="en-US" sz="1100" b="1" dirty="0">
+                          <a:solidFill>
+                            <a:srgbClr val="1F285A"/>
+                          </a:solidFill>
+                          <a:latin typeface="メイリオ" panose="020B0604030504040204" pitchFamily="50" charset="-128"/>
+                          <a:ea typeface="メイリオ" panose="020B0604030504040204" pitchFamily="50" charset="-128"/>
+                        </a:rPr>
+                        <a:t>顧客リストの可視化</a:t>
+                      </a:r>
+                      <a:endParaRPr lang="ja-JP" altLang="en-US" sz="1100" dirty="0"/>
+                    </a:p>
+                  </a:txBody>
+                  <a:tcPr marR="73152" marT="36576" marB="36576" anchor="ctr">
+                    <a:lnL w="9525" cap="flat" cmpd="sng" algn="ctr">
+                      <a:solidFill>
+                        <a:srgbClr val="D9D9D9"/>
+                      </a:solidFill>
+                      <a:prstDash val="solid"/>
+                      <a:round/>
+                      <a:headEnd type="none" w="med" len="med"/>
+                      <a:tailEnd type="none" w="med" len="med"/>
+                    </a:lnL>
+                    <a:lnR w="9525" cap="flat" cmpd="sng" algn="ctr">
+                      <a:solidFill>
+                        <a:srgbClr val="D9D9D9"/>
+                      </a:solidFill>
+                      <a:prstDash val="solid"/>
+                      <a:round/>
+                      <a:headEnd type="none" w="med" len="med"/>
+                      <a:tailEnd type="none" w="med" len="med"/>
+                    </a:lnR>
+                    <a:lnT w="9525" cap="flat" cmpd="sng" algn="ctr">
+                      <a:solidFill>
+                        <a:srgbClr val="D9D9D9"/>
+                      </a:solidFill>
+                      <a:prstDash val="solid"/>
+                      <a:round/>
+                      <a:headEnd type="none" w="med" len="med"/>
+                      <a:tailEnd type="none" w="med" len="med"/>
+                    </a:lnT>
+                    <a:lnB w="9525" cap="flat" cmpd="sng" algn="ctr">
+                      <a:solidFill>
+                        <a:srgbClr val="D9D9D9"/>
+                      </a:solidFill>
+                      <a:prstDash val="solid"/>
+                      <a:round/>
+                      <a:headEnd type="none" w="med" len="med"/>
+                      <a:tailEnd type="none" w="med" len="med"/>
+                    </a:lnB>
+                    <a:solidFill>
+                      <a:srgbClr val="FFFFFF"/>
+                    </a:solidFill>
+                  </a:tcPr>
+                </a:tc>
+                <a:tc>
+                  <a:txBody>
+                    <a:bodyPr/>
+                    <a:lstStyle/>
+                    <a:p>
+                      <a:pPr algn="l">
+                        <a:buNone/>
+                      </a:pPr>
+                      <a:r>
+                        <a:rPr lang="ja-JP" altLang="en-US" sz="1050" b="0" dirty="0">
+                          <a:solidFill>
+                            <a:srgbClr val="333333"/>
+                          </a:solidFill>
+                          <a:latin typeface="メイリオ" panose="020B0604030504040204" pitchFamily="50" charset="-128"/>
+                          <a:ea typeface="メイリオ" panose="020B0604030504040204" pitchFamily="50" charset="-128"/>
+                        </a:rPr>
+                        <a:t>・配信の予約と反応（開封・クリック）の確認</a:t>
+                      </a:r>
+                      <a:br>
+                        <a:rPr lang="ja-JP" altLang="en-US" sz="1050" b="0" dirty="0">
+                          <a:solidFill>
+                            <a:srgbClr val="333333"/>
+                          </a:solidFill>
+                          <a:latin typeface="メイリオ" panose="020B0604030504040204" pitchFamily="50" charset="-128"/>
+                          <a:ea typeface="メイリオ" panose="020B0604030504040204" pitchFamily="50" charset="-128"/>
+                        </a:rPr>
+                      </a:br>
+                      <a:r>
+                        <a:rPr lang="ja-JP" altLang="en-US" sz="1050" b="0" dirty="0">
+                          <a:solidFill>
+                            <a:srgbClr val="333333"/>
+                          </a:solidFill>
+                          <a:latin typeface="メイリオ" panose="020B0604030504040204" pitchFamily="50" charset="-128"/>
+                          <a:ea typeface="メイリオ" panose="020B0604030504040204" pitchFamily="50" charset="-128"/>
+                        </a:rPr>
+                        <a:t>・チャットタグで検討状況を管理（検討中・予約済・来場済）</a:t>
+                      </a:r>
+                      <a:br>
+                        <a:rPr lang="ja-JP" altLang="en-US" sz="1050" b="0" dirty="0">
+                          <a:solidFill>
+                            <a:srgbClr val="333333"/>
+                          </a:solidFill>
+                          <a:latin typeface="メイリオ" panose="020B0604030504040204" pitchFamily="50" charset="-128"/>
+                          <a:ea typeface="メイリオ" panose="020B0604030504040204" pitchFamily="50" charset="-128"/>
+                        </a:rPr>
+                      </a:br>
+                      <a:r>
+                        <a:rPr lang="ja-JP" altLang="en-US" sz="1050" b="0" dirty="0">
+                          <a:solidFill>
+                            <a:srgbClr val="333333"/>
+                          </a:solidFill>
+                          <a:latin typeface="メイリオ" panose="020B0604030504040204" pitchFamily="50" charset="-128"/>
+                          <a:ea typeface="メイリオ" panose="020B0604030504040204" pitchFamily="50" charset="-128"/>
+                        </a:rPr>
+                        <a:t>・来場予約の3日前・前日のリマインド配信（キャンセル対策）</a:t>
+                      </a:r>
+                      <a:endParaRPr lang="ja-JP" altLang="en-US" sz="1050" dirty="0"/>
+                    </a:p>
+                  </a:txBody>
+                  <a:tcPr marR="73152" marT="36576" marB="36576" anchor="ctr">
+                    <a:lnL w="9525" cap="flat" cmpd="sng" algn="ctr">
+                      <a:solidFill>
+                        <a:srgbClr val="D9D9D9"/>
+                      </a:solidFill>
+                      <a:prstDash val="solid"/>
+                      <a:round/>
+                      <a:headEnd type="none" w="med" len="med"/>
+                      <a:tailEnd type="none" w="med" len="med"/>
+                    </a:lnL>
+                    <a:lnR w="9525" cap="flat" cmpd="sng" algn="ctr">
+                      <a:solidFill>
+                        <a:srgbClr val="D9D9D9"/>
+                      </a:solidFill>
+                      <a:prstDash val="solid"/>
+                      <a:round/>
+                      <a:headEnd type="none" w="med" len="med"/>
+                      <a:tailEnd type="none" w="med" len="med"/>
+                    </a:lnR>
+                    <a:lnT w="9525" cap="flat" cmpd="sng" algn="ctr">
+                      <a:solidFill>
+                        <a:srgbClr val="D9D9D9"/>
+                      </a:solidFill>
+                      <a:prstDash val="solid"/>
+                      <a:round/>
+                      <a:headEnd type="none" w="med" len="med"/>
+                      <a:tailEnd type="none" w="med" len="med"/>
+                    </a:lnT>
+                    <a:lnB w="9525" cap="flat" cmpd="sng" algn="ctr">
+                      <a:solidFill>
+                        <a:srgbClr val="D9D9D9"/>
+                      </a:solidFill>
+                      <a:prstDash val="solid"/>
+                      <a:round/>
+                      <a:headEnd type="none" w="med" len="med"/>
+                      <a:tailEnd type="none" w="med" len="med"/>
+                    </a:lnB>
+                    <a:solidFill>
+                      <a:srgbClr val="FFFFFF"/>
+                    </a:solidFill>
+                  </a:tcPr>
+                </a:tc>
+                <a:extLst>
+                  <a:ext uri="{0D108BD9-81ED-4DB2-BD59-A6C34878D82A}">
+                    <a16:rowId xmlns:a16="http://schemas.microsoft.com/office/drawing/2014/main" val="10002"/>
+                  </a:ext>
+                </a:extLst>
+              </a:tr>
+              <a:tr h="868680">
+                <a:tc>
+                  <a:txBody>
+                    <a:bodyPr/>
+                    <a:lstStyle/>
+                    <a:p>
+                      <a:pPr algn="ctr">
+                        <a:buNone/>
+                      </a:pPr>
+                      <a:r>
+                        <a:rPr lang="ja-JP" altLang="en-US" sz="1150" b="1" dirty="0">
+                          <a:solidFill>
+                            <a:srgbClr val="1F285A"/>
+                          </a:solidFill>
+                          <a:latin typeface="メイリオ" panose="020B0604030504040204" pitchFamily="50" charset="-128"/>
+                          <a:ea typeface="メイリオ" panose="020B0604030504040204" pitchFamily="50" charset="-128"/>
+                        </a:rPr>
+                        <a:t>弊社</a:t>
+                      </a:r>
+                      <a:endParaRPr lang="ja-JP" altLang="en-US" sz="1150" dirty="0"/>
+                    </a:p>
+                  </a:txBody>
+                  <a:tcPr marR="73152" marT="36576" marB="36576" anchor="ctr">
+                    <a:lnL w="9525" cap="flat" cmpd="sng" algn="ctr">
+                      <a:solidFill>
+                        <a:srgbClr val="D9D9D9"/>
+                      </a:solidFill>
+                      <a:prstDash val="solid"/>
+                      <a:round/>
+                      <a:headEnd type="none" w="med" len="med"/>
+                      <a:tailEnd type="none" w="med" len="med"/>
+                    </a:lnL>
+                    <a:lnR w="9525" cap="flat" cmpd="sng" algn="ctr">
+                      <a:solidFill>
+                        <a:srgbClr val="D9D9D9"/>
+                      </a:solidFill>
+                      <a:prstDash val="solid"/>
+                      <a:round/>
+                      <a:headEnd type="none" w="med" len="med"/>
+                      <a:tailEnd type="none" w="med" len="med"/>
+                    </a:lnR>
+                    <a:lnT w="9525" cap="flat" cmpd="sng" algn="ctr">
+                      <a:solidFill>
+                        <a:srgbClr val="D9D9D9"/>
+                      </a:solidFill>
+                      <a:prstDash val="solid"/>
+                      <a:round/>
+                      <a:headEnd type="none" w="med" len="med"/>
+                      <a:tailEnd type="none" w="med" len="med"/>
+                    </a:lnT>
+                    <a:lnB w="9525" cap="flat" cmpd="sng" algn="ctr">
+                      <a:solidFill>
+                        <a:srgbClr val="D9D9D9"/>
+                      </a:solidFill>
+                      <a:prstDash val="solid"/>
+                      <a:round/>
+                      <a:headEnd type="none" w="med" len="med"/>
+                      <a:tailEnd type="none" w="med" len="med"/>
+                    </a:lnB>
+                    <a:solidFill>
+                      <a:srgbClr val="F4F7FF"/>
+                    </a:solidFill>
+                  </a:tcPr>
+                </a:tc>
+                <a:tc>
+                  <a:txBody>
+                    <a:bodyPr/>
+                    <a:lstStyle/>
+                    <a:p>
+                      <a:pPr algn="l">
+                        <a:buNone/>
+                      </a:pPr>
+                      <a:r>
+                        <a:rPr lang="ja-JP" altLang="en-US" sz="1100" b="1" dirty="0">
+                          <a:solidFill>
+                            <a:srgbClr val="1F285A"/>
+                          </a:solidFill>
+                          <a:latin typeface="メイリオ" panose="020B0604030504040204" pitchFamily="50" charset="-128"/>
+                          <a:ea typeface="メイリオ" panose="020B0604030504040204" pitchFamily="50" charset="-128"/>
+                        </a:rPr>
+                        <a:t>配信の設計・制作・分析</a:t>
+                      </a:r>
+                      <a:endParaRPr lang="ja-JP" altLang="en-US" sz="1100" dirty="0"/>
+                    </a:p>
+                  </a:txBody>
+                  <a:tcPr marR="73152" marT="36576" marB="36576" anchor="ctr">
+                    <a:lnL w="9525" cap="flat" cmpd="sng" algn="ctr">
+                      <a:solidFill>
+                        <a:srgbClr val="D9D9D9"/>
+                      </a:solidFill>
+                      <a:prstDash val="solid"/>
+                      <a:round/>
+                      <a:headEnd type="none" w="med" len="med"/>
+                      <a:tailEnd type="none" w="med" len="med"/>
+                    </a:lnL>
+                    <a:lnR w="9525" cap="flat" cmpd="sng" algn="ctr">
+                      <a:solidFill>
+                        <a:srgbClr val="D9D9D9"/>
+                      </a:solidFill>
+                      <a:prstDash val="solid"/>
+                      <a:round/>
+                      <a:headEnd type="none" w="med" len="med"/>
+                      <a:tailEnd type="none" w="med" len="med"/>
+                    </a:lnR>
+                    <a:lnT w="9525" cap="flat" cmpd="sng" algn="ctr">
+                      <a:solidFill>
+                        <a:srgbClr val="D9D9D9"/>
+                      </a:solidFill>
+                      <a:prstDash val="solid"/>
+                      <a:round/>
+                      <a:headEnd type="none" w="med" len="med"/>
+                      <a:tailEnd type="none" w="med" len="med"/>
+                    </a:lnT>
+                    <a:lnB w="9525" cap="flat" cmpd="sng" algn="ctr">
+                      <a:solidFill>
+                        <a:srgbClr val="D9D9D9"/>
+                      </a:solidFill>
+                      <a:prstDash val="solid"/>
+                      <a:round/>
+                      <a:headEnd type="none" w="med" len="med"/>
+                      <a:tailEnd type="none" w="med" len="med"/>
+                    </a:lnB>
+                    <a:solidFill>
+                      <a:srgbClr val="FFFFFF"/>
+                    </a:solidFill>
+                  </a:tcPr>
+                </a:tc>
+                <a:tc>
+                  <a:txBody>
+                    <a:bodyPr/>
+                    <a:lstStyle/>
+                    <a:p>
+                      <a:pPr algn="l">
+                        <a:buNone/>
+                      </a:pPr>
+                      <a:r>
+                        <a:rPr lang="ja-JP" altLang="en-US" sz="1050" b="0" dirty="0">
+                          <a:solidFill>
+                            <a:srgbClr val="333333"/>
+                          </a:solidFill>
+                          <a:latin typeface="メイリオ" panose="020B0604030504040204" pitchFamily="50" charset="-128"/>
+                          <a:ea typeface="メイリオ" panose="020B0604030504040204" pitchFamily="50" charset="-128"/>
+                        </a:rPr>
+                        <a:t>・配信の企画と、文面・画像の制作</a:t>
+                      </a:r>
+                      <a:br>
+                        <a:rPr lang="ja-JP" altLang="en-US" sz="1050" b="0" dirty="0">
+                          <a:solidFill>
+                            <a:srgbClr val="333333"/>
+                          </a:solidFill>
+                          <a:latin typeface="メイリオ" panose="020B0604030504040204" pitchFamily="50" charset="-128"/>
+                          <a:ea typeface="メイリオ" panose="020B0604030504040204" pitchFamily="50" charset="-128"/>
+                        </a:rPr>
+                      </a:br>
+                      <a:r>
+                        <a:rPr lang="ja-JP" altLang="en-US" sz="1050" b="0" dirty="0">
+                          <a:solidFill>
+                            <a:srgbClr val="333333"/>
+                          </a:solidFill>
+                          <a:latin typeface="メイリオ" panose="020B0604030504040204" pitchFamily="50" charset="-128"/>
+                          <a:ea typeface="メイリオ" panose="020B0604030504040204" pitchFamily="50" charset="-128"/>
+                        </a:rPr>
+                        <a:t>・月次で友だち数・反応・来場予約を分析し、配信を改善</a:t>
+                      </a:r>
+                      <a:endParaRPr lang="ja-JP" altLang="en-US" sz="1050" dirty="0"/>
+                    </a:p>
+                  </a:txBody>
+                  <a:tcPr marR="73152" marT="36576" marB="36576" anchor="ctr">
+                    <a:lnL w="9525" cap="flat" cmpd="sng" algn="ctr">
+                      <a:solidFill>
+                        <a:srgbClr val="D9D9D9"/>
+                      </a:solidFill>
+                      <a:prstDash val="solid"/>
+                      <a:round/>
+                      <a:headEnd type="none" w="med" len="med"/>
+                      <a:tailEnd type="none" w="med" len="med"/>
+                    </a:lnL>
+                    <a:lnR w="9525" cap="flat" cmpd="sng" algn="ctr">
+                      <a:solidFill>
+                        <a:srgbClr val="D9D9D9"/>
+                      </a:solidFill>
+                      <a:prstDash val="solid"/>
+                      <a:round/>
+                      <a:headEnd type="none" w="med" len="med"/>
+                      <a:tailEnd type="none" w="med" len="med"/>
+                    </a:lnR>
+                    <a:lnT w="9525" cap="flat" cmpd="sng" algn="ctr">
+                      <a:solidFill>
+                        <a:srgbClr val="D9D9D9"/>
+                      </a:solidFill>
+                      <a:prstDash val="solid"/>
+                      <a:round/>
+                      <a:headEnd type="none" w="med" len="med"/>
+                      <a:tailEnd type="none" w="med" len="med"/>
+                    </a:lnT>
+                    <a:lnB w="9525" cap="flat" cmpd="sng" algn="ctr">
+                      <a:solidFill>
+                        <a:srgbClr val="D9D9D9"/>
+                      </a:solidFill>
+                      <a:prstDash val="solid"/>
+                      <a:round/>
+                      <a:headEnd type="none" w="med" len="med"/>
+                      <a:tailEnd type="none" w="med" len="med"/>
+                    </a:lnB>
+                    <a:solidFill>
+                      <a:srgbClr val="FFFFFF"/>
+                    </a:solidFill>
+                  </a:tcPr>
+                </a:tc>
+                <a:extLst>
+                  <a:ext uri="{0D108BD9-81ED-4DB2-BD59-A6C34878D82A}">
+                    <a16:rowId xmlns:a16="http://schemas.microsoft.com/office/drawing/2014/main" val="10003"/>
+                  </a:ext>
+                </a:extLst>
+              </a:tr>
+            </a:tbl>
+          </a:graphicData>
+        </a:graphic>
+      </p:graphicFrame>
+      <p:sp>
+        <p:nvSpPr>
+          <p:cNvPr id="8" name="示唆"/>
+          <p:cNvSpPr/>
+          <p:nvPr/>
+        </p:nvSpPr>
+        <p:spPr>
+          <a:xfrm>
+            <a:off x="502920" y="5074920"/>
+            <a:ext cx="8897112" cy="566928"/>
+          </a:xfrm>
+          <a:prstGeom prst="rect">
+            <a:avLst/>
+          </a:prstGeom>
+          <a:solidFill>
+            <a:srgbClr val="F4F7FF"/>
+          </a:solidFill>
+          <a:ln>
+            <a:noFill/>
+          </a:ln>
+        </p:spPr>
+        <p:txBody>
+          <a:bodyPr wrap="square" lIns="73152" tIns="36576" rIns="73152" bIns="36576" rtlCol="0" anchor="ctr">
+            <a:noAutofit/>
+          </a:bodyPr>
+          <a:lstStyle/>
+          <a:p>
+            <a:pPr algn="ctr">
+              <a:buNone/>
+            </a:pPr>
+            <a:r>
+              <a:rPr lang="ja-JP" altLang="en-US" sz="1300" b="1" dirty="0">
+                <a:solidFill>
+                  <a:srgbClr val="C00000"/>
+                </a:solidFill>
+                <a:latin typeface="メイリオ" panose="020B0604030504040204" pitchFamily="50" charset="-128"/>
+                <a:ea typeface="メイリオ" panose="020B0604030504040204" pitchFamily="50" charset="-128"/>
+              </a:rPr>
+              <a:t>属人化しない：</a:t>
+            </a:r>
+            <a:r>
+              <a:rPr lang="ja-JP" altLang="en-US" sz="1300" b="1" dirty="0">
+                <a:solidFill>
+                  <a:srgbClr val="1F285A"/>
+                </a:solidFill>
+                <a:latin typeface="メイリオ" panose="020B0604030504040204" pitchFamily="50" charset="-128"/>
+                <a:ea typeface="メイリオ" panose="020B0604030504040204" pitchFamily="50" charset="-128"/>
+              </a:rPr>
+              <a:t>担当が替わっても、同じ配信・同じ追客が続く仕組み</a:t>
+            </a:r>
+            <a:endParaRPr lang="ja-JP" altLang="en-US" sz="1200" dirty="0"/>
+          </a:p>
+        </p:txBody>
+      </p:sp>
+      <p:sp>
+        <p:nvSpPr>
+          <p:cNvPr id="9" name="注記"/>
+          <p:cNvSpPr/>
+          <p:nvPr/>
+        </p:nvSpPr>
+        <p:spPr>
+          <a:xfrm>
+            <a:off x="502920" y="5852160"/>
+            <a:ext cx="8897112" cy="274320"/>
+          </a:xfrm>
+          <a:prstGeom prst="rect">
+            <a:avLst/>
+          </a:prstGeom>
+          <a:noFill/>
+          <a:ln>
+            <a:noFill/>
+          </a:ln>
+        </p:spPr>
+        <p:txBody>
+          <a:bodyPr wrap="square" lIns="0" tIns="0" rIns="0" bIns="0" rtlCol="0" anchor="t">
+            <a:noAutofit/>
+          </a:bodyPr>
+          <a:lstStyle/>
+          <a:p>
+            <a:pPr algn="l">
+              <a:lnSpc>
+                <a:spcPct val="115000"/>
+              </a:lnSpc>
+              <a:buNone/>
+            </a:pPr>
+            <a:r>
+              <a:rPr lang="ja-JP" altLang="en-US" sz="900" b="0" dirty="0">
+                <a:solidFill>
+                  <a:srgbClr val="7F7F7F"/>
+                </a:solidFill>
+                <a:latin typeface="メイリオ" panose="020B0604030504040204" pitchFamily="50" charset="-128"/>
+                <a:ea typeface="メイリオ" panose="020B0604030504040204" pitchFamily="50" charset="-128"/>
+              </a:rPr>
+              <a:t>※来場予約のリマインドは、予約の受け方に合わせて設定（連携の方法は構築時に決定）</a:t>
             </a:r>
             <a:endParaRPr lang="ja-JP" altLang="en-US" sz="1200" dirty="0"/>
           </a:p>
